--- a/system-design-101/vi/lessons/sd-13-013/slides/sd-13-013.pptx
+++ b/system-design-101/vi/lessons/sd-13-013/slides/sd-13-013.pptx
@@ -5327,6 +5327,61 @@
               <a:buNone/>
             </a:pPr>
             <a:r>
+              <a:rPr lang="en-US" sz="2550" dirty="0" spc="2" kern="0">
+                <a:solidFill>
+                  <a:srgbClr val="14161C"/>
+                </a:solidFill>
+                <a:latin typeface="Be Vietnam Pro" pitchFamily="34" charset="0"/>
+                <a:ea typeface="Be Vietnam Pro" pitchFamily="34" charset="-122"/>
+                <a:cs typeface="Be Vietnam Pro" pitchFamily="34" charset="-120"/>
+              </a:rPr>
+              <a:t>Bốn</a:t>
+            </a:r>
+            <a:r>
+              <a:rPr lang="en-US" sz="2550" dirty="0" spc="-4" kern="0">
+                <a:solidFill>
+                  <a:srgbClr val="14161C"/>
+                </a:solidFill>
+                <a:latin typeface="Be Vietnam Pro" pitchFamily="34" charset="0"/>
+                <a:ea typeface="Be Vietnam Pro" pitchFamily="34" charset="-122"/>
+                <a:cs typeface="Be Vietnam Pro" pitchFamily="34" charset="-120"/>
+              </a:rPr>
+              <a:t> sự</a:t>
+            </a:r>
+            <a:r>
+              <a:rPr lang="en-US" sz="2550" dirty="0" spc="0" kern="0">
+                <a:solidFill>
+                  <a:srgbClr val="14161C"/>
+                </a:solidFill>
+                <a:latin typeface="Be Vietnam Pro" pitchFamily="34" charset="0"/>
+                <a:ea typeface="Be Vietnam Pro" pitchFamily="34" charset="-122"/>
+                <a:cs typeface="Be Vietnam Pro" pitchFamily="34" charset="-120"/>
+              </a:rPr>
+              <a:t> cố</a:t>
+            </a:r>
+            <a:r>
+              <a:rPr lang="en-US" sz="2550" dirty="0" spc="10" kern="0">
+                <a:solidFill>
+                  <a:srgbClr val="14161C"/>
+                </a:solidFill>
+                <a:latin typeface="Be Vietnam Pro" pitchFamily="34" charset="0"/>
+                <a:ea typeface="Be Vietnam Pro" pitchFamily="34" charset="-122"/>
+                <a:cs typeface="Be Vietnam Pro" pitchFamily="34" charset="-120"/>
+              </a:rPr>
+              <a:t> độc</a:t>
+            </a:r>
+            <a:r>
+              <a:rPr lang="en-US" sz="2550" dirty="0" spc="0" kern="0">
+                <a:solidFill>
+                  <a:srgbClr val="14161C"/>
+                </a:solidFill>
+                <a:latin typeface="Be Vietnam Pro" pitchFamily="34" charset="0"/>
+                <a:ea typeface="Be Vietnam Pro" pitchFamily="34" charset="-122"/>
+                <a:cs typeface="Be Vietnam Pro" pitchFamily="34" charset="-120"/>
+              </a:rPr>
+              <a:t> lập</a:t>
+            </a:r>
+            <a:r>
               <a:rPr lang="en-US" sz="2550" dirty="0" spc="1" kern="0">
                 <a:solidFill>
                   <a:srgbClr val="14161C"/>
@@ -5335,73 +5390,7 @@
                 <a:ea typeface="Be Vietnam Pro" pitchFamily="34" charset="-122"/>
                 <a:cs typeface="Be Vietnam Pro" pitchFamily="34" charset="-120"/>
               </a:rPr>
-              <a:t>Cuối</a:t>
-            </a:r>
-            <a:r>
-              <a:rPr lang="en-US" sz="2550" dirty="0" spc="-1" kern="0">
-                <a:solidFill>
-                  <a:srgbClr val="14161C"/>
-                </a:solidFill>
-                <a:latin typeface="Be Vietnam Pro" pitchFamily="34" charset="0"/>
-                <a:ea typeface="Be Vietnam Pro" pitchFamily="34" charset="-122"/>
-                <a:cs typeface="Be Vietnam Pro" pitchFamily="34" charset="-120"/>
-              </a:rPr>
-              <a:t> bài:</a:t>
-            </a:r>
-            <a:r>
-              <a:rPr lang="en-US" sz="2550" dirty="0" spc="-6" kern="0">
-                <a:solidFill>
-                  <a:srgbClr val="14161C"/>
-                </a:solidFill>
-                <a:latin typeface="Be Vietnam Pro" pitchFamily="34" charset="0"/>
-                <a:ea typeface="Be Vietnam Pro" pitchFamily="34" charset="-122"/>
-                <a:cs typeface="Be Vietnam Pro" pitchFamily="34" charset="-120"/>
-              </a:rPr>
-              <a:t> một</a:t>
-            </a:r>
-            <a:r>
-              <a:rPr lang="en-US" sz="2550" dirty="0" spc="-11" kern="0">
-                <a:solidFill>
-                  <a:srgbClr val="14161C"/>
-                </a:solidFill>
-                <a:latin typeface="Be Vietnam Pro" pitchFamily="34" charset="0"/>
-                <a:ea typeface="Be Vietnam Pro" pitchFamily="34" charset="-122"/>
-                <a:cs typeface="Be Vietnam Pro" pitchFamily="34" charset="-120"/>
-              </a:rPr>
-              <a:t> tệp</a:t>
-            </a:r>
-            <a:r>
-              <a:rPr lang="en-US" sz="2550" dirty="0" spc="-5" kern="0">
-                <a:solidFill>
-                  <a:srgbClr val="14161C"/>
-                </a:solidFill>
-                <a:latin typeface="Be Vietnam Pro" pitchFamily="34" charset="0"/>
-                <a:ea typeface="Be Vietnam Pro" pitchFamily="34" charset="-122"/>
-                <a:cs typeface="Be Vietnam Pro" pitchFamily="34" charset="-120"/>
-              </a:rPr>
-              <a:t> Compose</a:t>
-            </a:r>
-            <a:r>
-              <a:rPr lang="en-US" sz="2550" dirty="0" spc="1" kern="0">
-                <a:solidFill>
-                  <a:srgbClr val="14161C"/>
-                </a:solidFill>
-                <a:latin typeface="Be Vietnam Pro" pitchFamily="34" charset="0"/>
-                <a:ea typeface="Be Vietnam Pro" pitchFamily="34" charset="-122"/>
-                <a:cs typeface="Be Vietnam Pro" pitchFamily="34" charset="-120"/>
-              </a:rPr>
-              <a:t> ghép cả</a:t>
-            </a:r>
-            <a:r>
-              <a:rPr lang="en-US" sz="2550" dirty="0" spc="-2" kern="0">
-                <a:solidFill>
-                  <a:srgbClr val="14161C"/>
-                </a:solidFill>
-                <a:latin typeface="Be Vietnam Pro" pitchFamily="34" charset="0"/>
-                <a:ea typeface="Be Vietnam Pro" pitchFamily="34" charset="-122"/>
-                <a:cs typeface="Be Vietnam Pro" pitchFamily="34" charset="-120"/>
-              </a:rPr>
-              <a:t> bốn.</a:t>
+              <a:t> nhau.</a:t>
             </a:r>
             <a:endParaRPr lang="en-US" sz="2550" dirty="0"/>
           </a:p>

--- a/system-design-101/vi/lessons/sd-13-013/slides/sd-13-013.pptx
+++ b/system-design-101/vi/lessons/sd-13-013/slides/sd-13-013.pptx
@@ -1794,7 +1794,7 @@
         <p:spPr>
           <a:xfrm>
             <a:off x="914400" y="1524000"/>
-            <a:ext cx="8191500" cy="3429000"/>
+            <a:ext cx="8191500" cy="4391025"/>
           </a:xfrm>
           <a:prstGeom prst="rect">
             <a:avLst/>
@@ -1803,17 +1803,17 @@
           <a:ln/>
         </p:spPr>
         <p:txBody>
-          <a:bodyPr wrap="square" lIns="0" tIns="46612" rIns="0" bIns="-46612" rtlCol="0" anchor="t"/>
+          <a:bodyPr wrap="square" lIns="0" tIns="66866" rIns="0" bIns="-66866" rtlCol="0" anchor="t"/>
           <a:lstStyle/>
           <a:p>
             <a:pPr algn="l" indent="0" marL="0">
               <a:lnSpc>
-                <a:spcPts val="5982"/>
+                <a:spcPts val="8586"/>
               </a:lnSpc>
               <a:buNone/>
             </a:pPr>
             <a:r>
-              <a:rPr lang="en-US" sz="5644" dirty="0" spc="-17" kern="0">
+              <a:rPr lang="en-US" sz="8100" dirty="0" spc="-27" kern="0">
                 <a:solidFill>
                   <a:srgbClr val="F3EEE3"/>
                 </a:solidFill>
@@ -1824,7 +1824,7 @@
               <a:t>Docker</a:t>
             </a:r>
             <a:r>
-              <a:rPr lang="en-US" sz="5644" dirty="0" spc="-3" kern="0">
+              <a:rPr lang="en-US" sz="8100" dirty="0" spc="-3" kern="0">
                 <a:solidFill>
                   <a:srgbClr val="F3EEE3"/>
                 </a:solidFill>
@@ -1835,7 +1835,7 @@
               <a:t> khi</a:t>
             </a:r>
             <a:r>
-              <a:rPr lang="en-US" sz="5644" dirty="0" spc="2" kern="0">
+              <a:rPr lang="en-US" sz="8100" dirty="0" spc="2" kern="0">
                 <a:solidFill>
                   <a:srgbClr val="F3EEE3"/>
                 </a:solidFill>
@@ -1846,7 +1846,7 @@
               <a:t> chạy</a:t>
             </a:r>
             <a:r>
-              <a:rPr lang="en-US" sz="5644" dirty="0" spc="-29" kern="0">
+              <a:rPr lang="en-US" sz="8100" dirty="0" spc="-44" kern="0">
                 <a:solidFill>
                   <a:srgbClr val="F3EEE3"/>
                 </a:solidFill>
@@ -1854,10 +1854,10 @@
                 <a:ea typeface="Bricolage Grotesque ExtraBold" pitchFamily="34" charset="-122"/>
                 <a:cs typeface="Bricolage Grotesque ExtraBold" pitchFamily="34" charset="-120"/>
               </a:rPr>
-              <a:t> web</a:t>
-            </a:r>
-            <a:r>
-              <a:rPr lang="en-US" sz="5644" dirty="0" spc="-28" kern="0">
+              <a:t> web kèm</a:t>
+            </a:r>
+            <a:r>
+              <a:rPr lang="en-US" sz="8100" dirty="0" spc="-2" kern="0">
                 <a:solidFill>
                   <a:srgbClr val="F3EEE3"/>
                 </a:solidFill>
@@ -1865,10 +1865,10 @@
                 <a:ea typeface="Bricolage Grotesque ExtraBold" pitchFamily="34" charset="-122"/>
                 <a:cs typeface="Bricolage Grotesque ExtraBold" pitchFamily="34" charset="-120"/>
               </a:rPr>
-              <a:t> kèm</a:t>
-            </a:r>
-            <a:r>
-              <a:rPr lang="en-US" sz="5644" dirty="0" spc="1" kern="0">
+              <a:t> cơ sở</a:t>
+            </a:r>
+            <a:r>
+              <a:rPr lang="en-US" sz="8100" dirty="0" spc="-1" kern="0">
                 <a:solidFill>
                   <a:srgbClr val="F3EEE3"/>
                 </a:solidFill>
@@ -1876,10 +1876,10 @@
                 <a:ea typeface="Bricolage Grotesque ExtraBold" pitchFamily="34" charset="-122"/>
                 <a:cs typeface="Bricolage Grotesque ExtraBold" pitchFamily="34" charset="-120"/>
               </a:rPr>
-              <a:t> cơ</a:t>
-            </a:r>
-            <a:r>
-              <a:rPr lang="en-US" sz="5644" dirty="0" spc="2" kern="0">
+              <a:t> dữ</a:t>
+            </a:r>
+            <a:r>
+              <a:rPr lang="en-US" sz="8100" dirty="0" spc="1" kern="0">
                 <a:solidFill>
                   <a:srgbClr val="F3EEE3"/>
                 </a:solidFill>
@@ -1887,10 +1887,10 @@
                 <a:ea typeface="Bricolage Grotesque ExtraBold" pitchFamily="34" charset="-122"/>
                 <a:cs typeface="Bricolage Grotesque ExtraBold" pitchFamily="34" charset="-120"/>
               </a:rPr>
-              <a:t> sở</a:t>
-            </a:r>
-            <a:r>
-              <a:rPr lang="en-US" sz="5644" dirty="0" spc="-4" kern="0">
+              <a:t> liệu:</a:t>
+            </a:r>
+            <a:r>
+              <a:rPr lang="en-US" sz="8100" dirty="0" spc="2" kern="0">
                 <a:solidFill>
                   <a:srgbClr val="F3EEE3"/>
                 </a:solidFill>
@@ -1898,10 +1898,10 @@
                 <a:ea typeface="Bricolage Grotesque ExtraBold" pitchFamily="34" charset="-122"/>
                 <a:cs typeface="Bricolage Grotesque ExtraBold" pitchFamily="34" charset="-120"/>
               </a:rPr>
-              <a:t> dữ</a:t>
-            </a:r>
-            <a:r>
-              <a:rPr lang="en-US" sz="5644" dirty="0" spc="3" kern="0">
+              <a:t> bốn</a:t>
+            </a:r>
+            <a:r>
+              <a:rPr lang="en-US" sz="8100" dirty="0" spc="1" kern="0">
                 <a:solidFill>
                   <a:srgbClr val="F3EEE3"/>
                 </a:solidFill>
@@ -1909,10 +1909,10 @@
                 <a:ea typeface="Bricolage Grotesque ExtraBold" pitchFamily="34" charset="-122"/>
                 <a:cs typeface="Bricolage Grotesque ExtraBold" pitchFamily="34" charset="-120"/>
               </a:rPr>
-              <a:t> liệu:</a:t>
-            </a:r>
-            <a:r>
-              <a:rPr lang="en-US" sz="5644" dirty="0" spc="-2" kern="0">
+              <a:t> chỗ</a:t>
+            </a:r>
+            <a:r>
+              <a:rPr lang="en-US" sz="8100" dirty="0" spc="2" kern="0">
                 <a:solidFill>
                   <a:srgbClr val="F3EEE3"/>
                 </a:solidFill>
@@ -1920,10 +1920,10 @@
                 <a:ea typeface="Bricolage Grotesque ExtraBold" pitchFamily="34" charset="-122"/>
                 <a:cs typeface="Bricolage Grotesque ExtraBold" pitchFamily="34" charset="-120"/>
               </a:rPr>
-              <a:t> bốn</a:t>
-            </a:r>
-            <a:r>
-              <a:rPr lang="en-US" sz="5644" dirty="0" spc="-1" kern="0">
+              <a:t> hay</a:t>
+            </a:r>
+            <a:r>
+              <a:rPr lang="en-US" sz="8100" dirty="0" spc="0" kern="0">
                 <a:solidFill>
                   <a:srgbClr val="F3EEE3"/>
                 </a:solidFill>
@@ -1931,31 +1931,9 @@
                 <a:ea typeface="Bricolage Grotesque ExtraBold" pitchFamily="34" charset="-122"/>
                 <a:cs typeface="Bricolage Grotesque ExtraBold" pitchFamily="34" charset="-120"/>
               </a:rPr>
-              <a:t> chỗ</a:t>
-            </a:r>
-            <a:r>
-              <a:rPr lang="en-US" sz="5644" dirty="0" spc="2" kern="0">
-                <a:solidFill>
-                  <a:srgbClr val="F3EEE3"/>
-                </a:solidFill>
-                <a:latin typeface="Bricolage Grotesque ExtraBold" pitchFamily="34" charset="0"/>
-                <a:ea typeface="Bricolage Grotesque ExtraBold" pitchFamily="34" charset="-122"/>
-                <a:cs typeface="Bricolage Grotesque ExtraBold" pitchFamily="34" charset="-120"/>
-              </a:rPr>
-              <a:t> hay</a:t>
-            </a:r>
-            <a:r>
-              <a:rPr lang="en-US" sz="5644" dirty="0" spc="-3" kern="0">
-                <a:solidFill>
-                  <a:srgbClr val="F3EEE3"/>
-                </a:solidFill>
-                <a:latin typeface="Bricolage Grotesque ExtraBold" pitchFamily="34" charset="0"/>
-                <a:ea typeface="Bricolage Grotesque ExtraBold" pitchFamily="34" charset="-122"/>
-                <a:cs typeface="Bricolage Grotesque ExtraBold" pitchFamily="34" charset="-120"/>
-              </a:rPr>
               <a:t> hỏng</a:t>
             </a:r>
-            <a:endParaRPr lang="en-US" sz="5644" dirty="0"/>
+            <a:endParaRPr lang="en-US" sz="8100" dirty="0"/>
           </a:p>
         </p:txBody>
       </p:sp>
@@ -1967,7 +1945,7 @@
         </p:nvSpPr>
         <p:spPr>
           <a:xfrm>
-            <a:off x="914400" y="5524500"/>
+            <a:off x="914400" y="6296025"/>
             <a:ext cx="8191500" cy="1047750"/>
           </a:xfrm>
           <a:prstGeom prst="rect">
@@ -2158,7 +2136,7 @@
               <a:t> nhóm</a:t>
             </a:r>
             <a:r>
-              <a:rPr lang="en-US" sz="1650" dirty="0" spc="-3" kern="0">
+              <a:rPr lang="en-US" sz="1650" dirty="0" spc="-4" kern="0">
                 <a:solidFill>
                   <a:srgbClr val="9AA0B5"/>
                 </a:solidFill>
@@ -2166,10 +2144,10 @@
                 <a:ea typeface="Be Vietnam Pro" pitchFamily="34" charset="-122"/>
                 <a:cs typeface="Be Vietnam Pro" pitchFamily="34" charset="-120"/>
               </a:rPr>
-              <a:t> Quan</a:t>
-            </a:r>
-            <a:r>
-              <a:rPr lang="en-US" sz="1650" dirty="0" spc="-9" kern="0">
+              <a:t> DevOps</a:t>
+            </a:r>
+            <a:r>
+              <a:rPr lang="en-US" sz="1650" dirty="0" spc="-7" kern="0">
                 <a:solidFill>
                   <a:srgbClr val="9AA0B5"/>
                 </a:solidFill>
@@ -2177,7 +2155,7 @@
                 <a:ea typeface="Be Vietnam Pro" pitchFamily="34" charset="-122"/>
                 <a:cs typeface="Be Vietnam Pro" pitchFamily="34" charset="-120"/>
               </a:rPr>
-              <a:t> sát</a:t>
+              <a:t> và</a:t>
             </a:r>
             <a:r>
               <a:rPr lang="en-US" sz="1650" dirty="0" spc="3" kern="0">
@@ -2188,18 +2166,7 @@
                 <a:ea typeface="Be Vietnam Pro" pitchFamily="34" charset="-122"/>
                 <a:cs typeface="Be Vietnam Pro" pitchFamily="34" charset="-120"/>
               </a:rPr>
-              <a:t> hệ</a:t>
-            </a:r>
-            <a:r>
-              <a:rPr lang="en-US" sz="1650" dirty="0" spc="1" kern="0">
-                <a:solidFill>
-                  <a:srgbClr val="9AA0B5"/>
-                </a:solidFill>
-                <a:latin typeface="Be Vietnam Pro" pitchFamily="34" charset="0"/>
-                <a:ea typeface="Be Vietnam Pro" pitchFamily="34" charset="-122"/>
-                <a:cs typeface="Be Vietnam Pro" pitchFamily="34" charset="-120"/>
-              </a:rPr>
-              <a:t> thống</a:t>
+              <a:t> CI/CD</a:t>
             </a:r>
             <a:endParaRPr lang="en-US" sz="1650" dirty="0"/>
           </a:p>
@@ -2980,7 +2947,7 @@
         <p:spPr>
           <a:xfrm>
             <a:off x="914400" y="1295400"/>
-            <a:ext cx="16192500" cy="914400"/>
+            <a:ext cx="16192500" cy="1085850"/>
           </a:xfrm>
           <a:prstGeom prst="rect">
             <a:avLst/>
@@ -2996,7 +2963,7 @@
               <a:buNone/>
             </a:pPr>
             <a:r>
-              <a:rPr lang="en-US" sz="5400" dirty="0" spc="-66" kern="0">
+              <a:rPr lang="en-US" sz="6900" dirty="0" spc="-83" kern="0">
                 <a:solidFill>
                   <a:srgbClr val="F3EEE3"/>
                 </a:solidFill>
@@ -3007,7 +2974,7 @@
               <a:t>Tra</a:t>
             </a:r>
             <a:r>
-              <a:rPr lang="en-US" sz="5400" dirty="0" spc="-2" kern="0">
+              <a:rPr lang="en-US" sz="6900" dirty="0" spc="0" kern="0">
                 <a:solidFill>
                   <a:srgbClr val="F3EEE3"/>
                 </a:solidFill>
@@ -3015,10 +2982,10 @@
                 <a:ea typeface="Bricolage Grotesque ExtraBold" pitchFamily="34" charset="-122"/>
                 <a:cs typeface="Bricolage Grotesque ExtraBold" pitchFamily="34" charset="-120"/>
               </a:rPr>
-              <a:t> lại khi</a:t>
-            </a:r>
-            <a:r>
-              <a:rPr lang="en-US" sz="5400" dirty="0" spc="-3" kern="0">
+              <a:t> lại</a:t>
+            </a:r>
+            <a:r>
+              <a:rPr lang="en-US" sz="6900" dirty="0" spc="1" kern="0">
                 <a:solidFill>
                   <a:srgbClr val="F3EEE3"/>
                 </a:solidFill>
@@ -3026,9 +2993,20 @@
                 <a:ea typeface="Bricolage Grotesque ExtraBold" pitchFamily="34" charset="-122"/>
                 <a:cs typeface="Bricolage Grotesque ExtraBold" pitchFamily="34" charset="-120"/>
               </a:rPr>
+              <a:t> khi</a:t>
+            </a:r>
+            <a:r>
+              <a:rPr lang="en-US" sz="6900" dirty="0" spc="-2" kern="0">
+                <a:solidFill>
+                  <a:srgbClr val="F3EEE3"/>
+                </a:solidFill>
+                <a:latin typeface="Bricolage Grotesque ExtraBold" pitchFamily="34" charset="0"/>
+                <a:ea typeface="Bricolage Grotesque ExtraBold" pitchFamily="34" charset="-122"/>
+                <a:cs typeface="Bricolage Grotesque ExtraBold" pitchFamily="34" charset="-120"/>
+              </a:rPr>
               <a:t> cần</a:t>
             </a:r>
-            <a:endParaRPr lang="en-US" sz="5400" dirty="0"/>
+            <a:endParaRPr lang="en-US" sz="6900" dirty="0"/>
           </a:p>
         </p:txBody>
       </p:sp>
@@ -5939,7 +5917,7 @@
         <p:spPr>
           <a:xfrm>
             <a:off x="914400" y="1333500"/>
-            <a:ext cx="16459200" cy="952500"/>
+            <a:ext cx="16459200" cy="1085850"/>
           </a:xfrm>
           <a:prstGeom prst="rect">
             <a:avLst/>
@@ -5955,7 +5933,7 @@
               <a:buNone/>
             </a:pPr>
             <a:r>
-              <a:rPr lang="en-US" sz="5100" dirty="0" spc="-16" kern="0">
+              <a:rPr lang="en-US" sz="6900" dirty="0" spc="7" kern="0">
                 <a:solidFill>
                   <a:srgbClr val="14161C"/>
                 </a:solidFill>
@@ -5963,10 +5941,10 @@
                 <a:ea typeface="Bricolage Grotesque ExtraBold" pitchFamily="34" charset="-122"/>
                 <a:cs typeface="Bricolage Grotesque ExtraBold" pitchFamily="34" charset="-120"/>
               </a:rPr>
-              <a:t>Đặt</a:t>
-            </a:r>
-            <a:r>
-              <a:rPr lang="en-US" sz="5100" dirty="0" spc="0" kern="0">
+              <a:t>Dữ liệu</a:t>
+            </a:r>
+            <a:r>
+              <a:rPr lang="en-US" sz="6900" dirty="0" spc="-57" kern="0">
                 <a:solidFill>
                   <a:srgbClr val="14161C"/>
                 </a:solidFill>
@@ -5974,10 +5952,10 @@
                 <a:ea typeface="Bricolage Grotesque ExtraBold" pitchFamily="34" charset="-122"/>
                 <a:cs typeface="Bricolage Grotesque ExtraBold" pitchFamily="34" charset="-120"/>
               </a:rPr>
-              <a:t> dữ</a:t>
-            </a:r>
-            <a:r>
-              <a:rPr lang="en-US" sz="5100" dirty="0" spc="6" kern="0">
+              <a:t> vào</a:t>
+            </a:r>
+            <a:r>
+              <a:rPr lang="en-US" sz="6900" dirty="0" spc="-30" kern="0">
                 <a:solidFill>
                   <a:srgbClr val="14161C"/>
                 </a:solidFill>
@@ -5985,10 +5963,10 @@
                 <a:ea typeface="Bricolage Grotesque ExtraBold" pitchFamily="34" charset="-122"/>
                 <a:cs typeface="Bricolage Grotesque ExtraBold" pitchFamily="34" charset="-120"/>
               </a:rPr>
-              <a:t> liệu</a:t>
-            </a:r>
-            <a:r>
-              <a:rPr lang="en-US" sz="5100" dirty="0" spc="-41" kern="0">
+              <a:t> volume,</a:t>
+            </a:r>
+            <a:r>
+              <a:rPr lang="en-US" sz="6900" dirty="0" spc="0" kern="0">
                 <a:solidFill>
                   <a:srgbClr val="14161C"/>
                 </a:solidFill>
@@ -5996,10 +5974,10 @@
                 <a:ea typeface="Bricolage Grotesque ExtraBold" pitchFamily="34" charset="-122"/>
                 <a:cs typeface="Bricolage Grotesque ExtraBold" pitchFamily="34" charset="-120"/>
               </a:rPr>
-              <a:t> vào</a:t>
-            </a:r>
-            <a:r>
-              <a:rPr lang="en-US" sz="5100" dirty="0" spc="-21" kern="0">
+              <a:t> không</a:t>
+            </a:r>
+            <a:r>
+              <a:rPr lang="en-US" sz="6900" dirty="0" spc="-43" kern="0">
                 <a:solidFill>
                   <a:srgbClr val="14161C"/>
                 </a:solidFill>
@@ -6007,10 +5985,10 @@
                 <a:ea typeface="Bricolage Grotesque ExtraBold" pitchFamily="34" charset="-122"/>
                 <a:cs typeface="Bricolage Grotesque ExtraBold" pitchFamily="34" charset="-120"/>
               </a:rPr>
-              <a:t> volume,</a:t>
-            </a:r>
-            <a:r>
-              <a:rPr lang="en-US" sz="5100" dirty="0" spc="1" kern="0">
+              <a:t> lớp</a:t>
+            </a:r>
+            <a:r>
+              <a:rPr lang="en-US" sz="6900" dirty="0" spc="1" kern="0">
                 <a:solidFill>
                   <a:srgbClr val="14161C"/>
                 </a:solidFill>
@@ -6018,42 +5996,9 @@
                 <a:ea typeface="Bricolage Grotesque ExtraBold" pitchFamily="34" charset="-122"/>
                 <a:cs typeface="Bricolage Grotesque ExtraBold" pitchFamily="34" charset="-120"/>
               </a:rPr>
-              <a:t> không</a:t>
-            </a:r>
-            <a:r>
-              <a:rPr lang="en-US" sz="5100" dirty="0" spc="-41" kern="0">
-                <a:solidFill>
-                  <a:srgbClr val="14161C"/>
-                </a:solidFill>
-                <a:latin typeface="Bricolage Grotesque ExtraBold" pitchFamily="34" charset="0"/>
-                <a:ea typeface="Bricolage Grotesque ExtraBold" pitchFamily="34" charset="-122"/>
-                <a:cs typeface="Bricolage Grotesque ExtraBold" pitchFamily="34" charset="-120"/>
-              </a:rPr>
-              <a:t> vào</a:t>
-            </a:r>
-            <a:r>
-              <a:rPr lang="en-US" sz="5100" dirty="0" spc="-32" kern="0">
-                <a:solidFill>
-                  <a:srgbClr val="14161C"/>
-                </a:solidFill>
-                <a:latin typeface="Bricolage Grotesque ExtraBold" pitchFamily="34" charset="0"/>
-                <a:ea typeface="Bricolage Grotesque ExtraBold" pitchFamily="34" charset="-122"/>
-                <a:cs typeface="Bricolage Grotesque ExtraBold" pitchFamily="34" charset="-120"/>
-              </a:rPr>
-              <a:t> lớp</a:t>
-            </a:r>
-            <a:r>
-              <a:rPr lang="en-US" sz="5100" dirty="0" spc="2" kern="0">
-                <a:solidFill>
-                  <a:srgbClr val="14161C"/>
-                </a:solidFill>
-                <a:latin typeface="Bricolage Grotesque ExtraBold" pitchFamily="34" charset="0"/>
-                <a:ea typeface="Bricolage Grotesque ExtraBold" pitchFamily="34" charset="-122"/>
-                <a:cs typeface="Bricolage Grotesque ExtraBold" pitchFamily="34" charset="-120"/>
-              </a:rPr>
               <a:t> ghi</a:t>
             </a:r>
-            <a:endParaRPr lang="en-US" sz="5100" dirty="0"/>
+            <a:endParaRPr lang="en-US" sz="6900" dirty="0"/>
           </a:p>
         </p:txBody>
       </p:sp>
@@ -7563,7 +7508,7 @@
         <p:spPr>
           <a:xfrm>
             <a:off x="914400" y="1333500"/>
-            <a:ext cx="16459200" cy="952500"/>
+            <a:ext cx="16459200" cy="1085850"/>
           </a:xfrm>
           <a:prstGeom prst="rect">
             <a:avLst/>
@@ -7579,7 +7524,7 @@
               <a:buNone/>
             </a:pPr>
             <a:r>
-              <a:rPr lang="en-US" sz="5100" dirty="0" spc="5" kern="0">
+              <a:rPr lang="en-US" sz="6900" dirty="0" spc="6" kern="0">
                 <a:solidFill>
                   <a:srgbClr val="F3EEE3"/>
                 </a:solidFill>
@@ -7590,7 +7535,7 @@
               <a:t>Chung</a:t>
             </a:r>
             <a:r>
-              <a:rPr lang="en-US" sz="5100" dirty="0" spc="-7" kern="0">
+              <a:rPr lang="en-US" sz="6900" dirty="0" spc="-10" kern="0">
                 <a:solidFill>
                   <a:srgbClr val="F3EEE3"/>
                 </a:solidFill>
@@ -7601,7 +7546,7 @@
               <a:t> network,</a:t>
             </a:r>
             <a:r>
-              <a:rPr lang="en-US" sz="5100" dirty="0" spc="-28" kern="0">
+              <a:rPr lang="en-US" sz="6900" dirty="0" spc="-41" kern="0">
                 <a:solidFill>
                   <a:srgbClr val="F3EEE3"/>
                 </a:solidFill>
@@ -7612,7 +7557,7 @@
               <a:t> gọi</a:t>
             </a:r>
             <a:r>
-              <a:rPr lang="en-US" sz="5100" dirty="0" spc="-3" kern="0">
+              <a:rPr lang="en-US" sz="6900" dirty="0" spc="-18" kern="0">
                 <a:solidFill>
                   <a:srgbClr val="F3EEE3"/>
                 </a:solidFill>
@@ -7620,10 +7565,10 @@
                 <a:ea typeface="Bricolage Grotesque ExtraBold" pitchFamily="34" charset="-122"/>
                 <a:cs typeface="Bricolage Grotesque ExtraBold" pitchFamily="34" charset="-120"/>
               </a:rPr>
-              <a:t> bằng</a:t>
-            </a:r>
-            <a:r>
-              <a:rPr lang="en-US" sz="5100" dirty="0" spc="-14" kern="0">
+              <a:t> tên</a:t>
+            </a:r>
+            <a:r>
+              <a:rPr lang="en-US" sz="6900" dirty="0" spc="0" kern="0">
                 <a:solidFill>
                   <a:srgbClr val="F3EEE3"/>
                 </a:solidFill>
@@ -7631,31 +7576,9 @@
                 <a:ea typeface="Bricolage Grotesque ExtraBold" pitchFamily="34" charset="-122"/>
                 <a:cs typeface="Bricolage Grotesque ExtraBold" pitchFamily="34" charset="-120"/>
               </a:rPr>
-              <a:t> tên</a:t>
-            </a:r>
-            <a:r>
-              <a:rPr lang="en-US" sz="5100" dirty="0" spc="1" kern="0">
-                <a:solidFill>
-                  <a:srgbClr val="F3EEE3"/>
-                </a:solidFill>
-                <a:latin typeface="Bricolage Grotesque ExtraBold" pitchFamily="34" charset="0"/>
-                <a:ea typeface="Bricolage Grotesque ExtraBold" pitchFamily="34" charset="-122"/>
-                <a:cs typeface="Bricolage Grotesque ExtraBold" pitchFamily="34" charset="-120"/>
-              </a:rPr>
-              <a:t> dịch</a:t>
-            </a:r>
-            <a:r>
-              <a:rPr lang="en-US" sz="5100" dirty="0" spc="2" kern="0">
-                <a:solidFill>
-                  <a:srgbClr val="F3EEE3"/>
-                </a:solidFill>
-                <a:latin typeface="Bricolage Grotesque ExtraBold" pitchFamily="34" charset="0"/>
-                <a:ea typeface="Bricolage Grotesque ExtraBold" pitchFamily="34" charset="-122"/>
-                <a:cs typeface="Bricolage Grotesque ExtraBold" pitchFamily="34" charset="-120"/>
-              </a:rPr>
-              <a:t> vụ</a:t>
-            </a:r>
-            <a:endParaRPr lang="en-US" sz="5100" dirty="0"/>
+              <a:t> dịch vụ</a:t>
+            </a:r>
+            <a:endParaRPr lang="en-US" sz="6900" dirty="0"/>
           </a:p>
         </p:txBody>
       </p:sp>
@@ -8971,7 +8894,7 @@
         <p:spPr>
           <a:xfrm>
             <a:off x="914400" y="1333500"/>
-            <a:ext cx="16459200" cy="952500"/>
+            <a:ext cx="16459200" cy="1085850"/>
           </a:xfrm>
           <a:prstGeom prst="rect">
             <a:avLst/>
@@ -8987,7 +8910,7 @@
               <a:buNone/>
             </a:pPr>
             <a:r>
-              <a:rPr lang="en-US" sz="5100" dirty="0" spc="-138" kern="0">
+              <a:rPr lang="en-US" sz="6900" dirty="0" spc="-186" kern="0">
                 <a:solidFill>
                   <a:srgbClr val="14161C"/>
                 </a:solidFill>
@@ -8998,7 +8921,7 @@
               <a:t>Với</a:t>
             </a:r>
             <a:r>
-              <a:rPr lang="en-US" sz="5100" dirty="0" spc="-18" kern="0">
+              <a:rPr lang="en-US" sz="6900" dirty="0" spc="-25" kern="0">
                 <a:solidFill>
                   <a:srgbClr val="14161C"/>
                 </a:solidFill>
@@ -9009,7 +8932,7 @@
               <a:t> bridge,</a:t>
             </a:r>
             <a:r>
-              <a:rPr lang="en-US" sz="5100" dirty="0" spc="4" kern="0">
+              <a:rPr lang="en-US" sz="6900" dirty="0" spc="4" kern="0">
                 <a:solidFill>
                   <a:srgbClr val="14161C"/>
                 </a:solidFill>
@@ -9020,7 +8943,7 @@
               <a:t> phải</a:t>
             </a:r>
             <a:r>
-              <a:rPr lang="en-US" sz="5100" dirty="0" spc="5" kern="0">
+              <a:rPr lang="en-US" sz="6900" dirty="0" spc="6" kern="0">
                 <a:solidFill>
                   <a:srgbClr val="14161C"/>
                 </a:solidFill>
@@ -9031,7 +8954,7 @@
               <a:t> publish</a:t>
             </a:r>
             <a:r>
-              <a:rPr lang="en-US" sz="5100" dirty="0" spc="1" kern="0">
+              <a:rPr lang="en-US" sz="6900" dirty="0" spc="0" kern="0">
                 <a:solidFill>
                   <a:srgbClr val="14161C"/>
                 </a:solidFill>
@@ -9041,7 +8964,7 @@
               </a:rPr>
               <a:t> cổng</a:t>
             </a:r>
-            <a:endParaRPr lang="en-US" sz="5100" dirty="0"/>
+            <a:endParaRPr lang="en-US" sz="6900" dirty="0"/>
           </a:p>
         </p:txBody>
       </p:sp>
@@ -10440,7 +10363,7 @@
         <p:spPr>
           <a:xfrm>
             <a:off x="1524000" y="2095500"/>
-            <a:ext cx="15811500" cy="1333500"/>
+            <a:ext cx="15811500" cy="2190750"/>
           </a:xfrm>
           <a:prstGeom prst="rect">
             <a:avLst/>
@@ -10449,17 +10372,17 @@
           <a:ln/>
         </p:spPr>
         <p:txBody>
-          <a:bodyPr wrap="square" lIns="0" tIns="33528" rIns="0" bIns="-33528" rtlCol="0" anchor="t"/>
+          <a:bodyPr wrap="square" lIns="0" tIns="35052" rIns="0" bIns="-35052" rtlCol="0" anchor="t"/>
           <a:lstStyle/>
           <a:p>
             <a:pPr algn="l" indent="0" marL="0">
               <a:lnSpc>
-                <a:spcPts val="7392"/>
+                <a:spcPts val="7728"/>
               </a:lnSpc>
               <a:buNone/>
             </a:pPr>
             <a:r>
-              <a:rPr lang="en-US" sz="6600" dirty="0" spc="-22" kern="0">
+              <a:rPr lang="en-US" sz="6900" dirty="0" spc="-21" kern="0">
                 <a:solidFill>
                   <a:srgbClr val="14161C"/>
                 </a:solidFill>
@@ -10470,7 +10393,7 @@
               <a:t>Đặt</a:t>
             </a:r>
             <a:r>
-              <a:rPr lang="en-US" sz="6600" dirty="0" spc="-7" kern="0">
+              <a:rPr lang="en-US" sz="6900" dirty="0" spc="-7" kern="0">
                 <a:solidFill>
                   <a:srgbClr val="14161C"/>
                 </a:solidFill>
@@ -10481,7 +10404,7 @@
               <a:t> restart</a:t>
             </a:r>
             <a:r>
-              <a:rPr lang="en-US" sz="6600" dirty="0" spc="-6" kern="0">
+              <a:rPr lang="en-US" sz="6900" dirty="0" spc="-6" kern="0">
                 <a:solidFill>
                   <a:srgbClr val="14161C"/>
                 </a:solidFill>
@@ -10492,7 +10415,7 @@
               <a:t> policy,</a:t>
             </a:r>
             <a:r>
-              <a:rPr lang="en-US" sz="6600" dirty="0" spc="-1" kern="0">
+              <a:rPr lang="en-US" sz="6900" dirty="0" spc="-1" kern="0">
                 <a:solidFill>
                   <a:srgbClr val="14161C"/>
                 </a:solidFill>
@@ -10503,7 +10426,7 @@
               <a:t> ví</a:t>
             </a:r>
             <a:r>
-              <a:rPr lang="en-US" sz="6600" dirty="0" spc="2" kern="0">
+              <a:rPr lang="en-US" sz="6900" dirty="0" spc="2" kern="0">
                 <a:solidFill>
                   <a:srgbClr val="14161C"/>
                 </a:solidFill>
@@ -10514,7 +10437,7 @@
               <a:t> dụ</a:t>
             </a:r>
             <a:r>
-              <a:rPr lang="en-US" sz="6600" dirty="0" spc="-6" kern="0">
+              <a:rPr lang="en-US" sz="6900" dirty="0" spc="-5" kern="0">
                 <a:solidFill>
                   <a:srgbClr val="14161C"/>
                 </a:solidFill>
@@ -10524,7 +10447,7 @@
               </a:rPr>
               <a:t> unless-stopped.</a:t>
             </a:r>
-            <a:endParaRPr lang="en-US" sz="6600" dirty="0"/>
+            <a:endParaRPr lang="en-US" sz="6900" dirty="0"/>
           </a:p>
         </p:txBody>
       </p:sp>
@@ -11332,7 +11255,7 @@
         <p:spPr>
           <a:xfrm>
             <a:off x="914400" y="1333500"/>
-            <a:ext cx="16459200" cy="952500"/>
+            <a:ext cx="16459200" cy="1085850"/>
           </a:xfrm>
           <a:prstGeom prst="rect">
             <a:avLst/>
@@ -11348,7 +11271,7 @@
               <a:buNone/>
             </a:pPr>
             <a:r>
-              <a:rPr lang="en-US" sz="5100" dirty="0" spc="0" kern="0">
+              <a:rPr lang="en-US" sz="6900" dirty="0" spc="2" kern="0">
                 <a:solidFill>
                   <a:srgbClr val="F3EEE3"/>
                 </a:solidFill>
@@ -11359,7 +11282,7 @@
               <a:t>Làm</a:t>
             </a:r>
             <a:r>
-              <a:rPr lang="en-US" sz="5100" dirty="0" spc="-68" kern="0">
+              <a:rPr lang="en-US" sz="6900" dirty="0" spc="-92" kern="0">
                 <a:solidFill>
                   <a:srgbClr val="F3EEE3"/>
                 </a:solidFill>
@@ -11370,7 +11293,7 @@
               <a:t> được</a:t>
             </a:r>
             <a:r>
-              <a:rPr lang="en-US" sz="5100" dirty="0" spc="-20" kern="0">
+              <a:rPr lang="en-US" sz="6900" dirty="0" spc="-25" kern="0">
                 <a:solidFill>
                   <a:srgbClr val="F3EEE3"/>
                 </a:solidFill>
@@ -11381,7 +11304,7 @@
               <a:t> gì,</a:t>
             </a:r>
             <a:r>
-              <a:rPr lang="en-US" sz="5100" dirty="0" spc="-56" kern="0">
+              <a:rPr lang="en-US" sz="6900" dirty="0" spc="1" kern="0">
                 <a:solidFill>
                   <a:srgbClr val="F3EEE3"/>
                 </a:solidFill>
@@ -11389,10 +11312,10 @@
                 <a:ea typeface="Bricolage Grotesque ExtraBold" pitchFamily="34" charset="-122"/>
                 <a:cs typeface="Bricolage Grotesque ExtraBold" pitchFamily="34" charset="-120"/>
               </a:rPr>
-              <a:t> và</a:t>
-            </a:r>
-            <a:r>
-              <a:rPr lang="en-US" sz="5100" dirty="0" spc="1" kern="0">
+              <a:t> không</a:t>
+            </a:r>
+            <a:r>
+              <a:rPr lang="en-US" sz="6900" dirty="0" spc="0" kern="0">
                 <a:solidFill>
                   <a:srgbClr val="F3EEE3"/>
                 </a:solidFill>
@@ -11400,10 +11323,10 @@
                 <a:ea typeface="Bricolage Grotesque ExtraBold" pitchFamily="34" charset="-122"/>
                 <a:cs typeface="Bricolage Grotesque ExtraBold" pitchFamily="34" charset="-120"/>
               </a:rPr>
-              <a:t> không thay</a:t>
-            </a:r>
-            <a:r>
-              <a:rPr lang="en-US" sz="5100" dirty="0" spc="-68" kern="0">
+              <a:t> thay</a:t>
+            </a:r>
+            <a:r>
+              <a:rPr lang="en-US" sz="6900" dirty="0" spc="-91" kern="0">
                 <a:solidFill>
                   <a:srgbClr val="F3EEE3"/>
                 </a:solidFill>
@@ -11414,7 +11337,7 @@
               <a:t> được</a:t>
             </a:r>
             <a:r>
-              <a:rPr lang="en-US" sz="5100" dirty="0" spc="-22" kern="0">
+              <a:rPr lang="en-US" sz="6900" dirty="0" spc="-28" kern="0">
                 <a:solidFill>
                   <a:srgbClr val="F3EEE3"/>
                 </a:solidFill>
@@ -11424,7 +11347,7 @@
               </a:rPr>
               <a:t> gì</a:t>
             </a:r>
-            <a:endParaRPr lang="en-US" sz="5100" dirty="0"/>
+            <a:endParaRPr lang="en-US" sz="6900" dirty="0"/>
           </a:p>
         </p:txBody>
       </p:sp>
@@ -12818,7 +12741,7 @@
         <p:spPr>
           <a:xfrm>
             <a:off x="914400" y="1333500"/>
-            <a:ext cx="16459200" cy="952500"/>
+            <a:ext cx="16459200" cy="1085850"/>
           </a:xfrm>
           <a:prstGeom prst="rect">
             <a:avLst/>
@@ -12834,7 +12757,7 @@
               <a:buNone/>
             </a:pPr>
             <a:r>
-              <a:rPr lang="en-US" sz="4800" dirty="0" spc="-31" kern="0">
+              <a:rPr lang="en-US" sz="6900" dirty="0" spc="11" kern="0">
                 <a:solidFill>
                   <a:srgbClr val="14161C"/>
                 </a:solidFill>
@@ -12842,10 +12765,10 @@
                 <a:ea typeface="Bricolage Grotesque ExtraBold" pitchFamily="34" charset="-122"/>
                 <a:cs typeface="Bricolage Grotesque ExtraBold" pitchFamily="34" charset="-120"/>
               </a:rPr>
-              <a:t>Trong</a:t>
-            </a:r>
-            <a:r>
-              <a:rPr lang="en-US" sz="4800" dirty="0" spc="-2" kern="0">
+              <a:t>localhost:5432</a:t>
+            </a:r>
+            <a:r>
+              <a:rPr lang="en-US" sz="6900" dirty="0" spc="-22" kern="0">
                 <a:solidFill>
                   <a:srgbClr val="14161C"/>
                 </a:solidFill>
@@ -12853,10 +12776,10 @@
                 <a:ea typeface="Bricolage Grotesque ExtraBold" pitchFamily="34" charset="-122"/>
                 <a:cs typeface="Bricolage Grotesque ExtraBold" pitchFamily="34" charset="-120"/>
               </a:rPr>
-              <a:t> container</a:t>
-            </a:r>
-            <a:r>
-              <a:rPr lang="en-US" sz="4800" dirty="0" spc="-27" kern="0">
+              <a:t> trỏ</a:t>
+            </a:r>
+            <a:r>
+              <a:rPr lang="en-US" sz="6900" dirty="0" spc="-63" kern="0">
                 <a:solidFill>
                   <a:srgbClr val="14161C"/>
                 </a:solidFill>
@@ -12864,10 +12787,10 @@
                 <a:ea typeface="Bricolage Grotesque ExtraBold" pitchFamily="34" charset="-122"/>
                 <a:cs typeface="Bricolage Grotesque ExtraBold" pitchFamily="34" charset="-120"/>
               </a:rPr>
-              <a:t> web,</a:t>
-            </a:r>
-            <a:r>
-              <a:rPr lang="en-US" sz="4800" dirty="0" spc="5" kern="0">
+              <a:t> tới</a:t>
+            </a:r>
+            <a:r>
+              <a:rPr lang="en-US" sz="6900" dirty="0" spc="4" kern="0">
                 <a:solidFill>
                   <a:srgbClr val="14161C"/>
                 </a:solidFill>
@@ -12875,42 +12798,9 @@
                 <a:ea typeface="Bricolage Grotesque ExtraBold" pitchFamily="34" charset="-122"/>
                 <a:cs typeface="Bricolage Grotesque ExtraBold" pitchFamily="34" charset="-120"/>
               </a:rPr>
-              <a:t> localhost:5432</a:t>
-            </a:r>
-            <a:r>
-              <a:rPr lang="en-US" sz="4800" dirty="0" spc="-16" kern="0">
-                <a:solidFill>
-                  <a:srgbClr val="14161C"/>
-                </a:solidFill>
-                <a:latin typeface="Bricolage Grotesque ExtraBold" pitchFamily="34" charset="0"/>
-                <a:ea typeface="Bricolage Grotesque ExtraBold" pitchFamily="34" charset="-122"/>
-                <a:cs typeface="Bricolage Grotesque ExtraBold" pitchFamily="34" charset="-120"/>
-              </a:rPr>
-              <a:t> trỏ</a:t>
-            </a:r>
-            <a:r>
-              <a:rPr lang="en-US" sz="4800" dirty="0" spc="-45" kern="0">
-                <a:solidFill>
-                  <a:srgbClr val="14161C"/>
-                </a:solidFill>
-                <a:latin typeface="Bricolage Grotesque ExtraBold" pitchFamily="34" charset="0"/>
-                <a:ea typeface="Bricolage Grotesque ExtraBold" pitchFamily="34" charset="-122"/>
-                <a:cs typeface="Bricolage Grotesque ExtraBold" pitchFamily="34" charset="-120"/>
-              </a:rPr>
-              <a:t> tới</a:t>
-            </a:r>
-            <a:r>
-              <a:rPr lang="en-US" sz="4800" dirty="0" spc="3" kern="0">
-                <a:solidFill>
-                  <a:srgbClr val="14161C"/>
-                </a:solidFill>
-                <a:latin typeface="Bricolage Grotesque ExtraBold" pitchFamily="34" charset="0"/>
-                <a:ea typeface="Bricolage Grotesque ExtraBold" pitchFamily="34" charset="-122"/>
-                <a:cs typeface="Bricolage Grotesque ExtraBold" pitchFamily="34" charset="-120"/>
-              </a:rPr>
               <a:t> đâu?</a:t>
             </a:r>
-            <a:endParaRPr lang="en-US" sz="4800" dirty="0"/>
+            <a:endParaRPr lang="en-US" sz="6900" dirty="0"/>
           </a:p>
         </p:txBody>
       </p:sp>
@@ -13990,7 +13880,7 @@
         <p:spPr>
           <a:xfrm>
             <a:off x="914400" y="1333500"/>
-            <a:ext cx="16459200" cy="952500"/>
+            <a:ext cx="16459200" cy="1085850"/>
           </a:xfrm>
           <a:prstGeom prst="rect">
             <a:avLst/>
@@ -14006,7 +13896,7 @@
               <a:buNone/>
             </a:pPr>
             <a:r>
-              <a:rPr lang="en-US" sz="5100" dirty="0" spc="-2" kern="0">
+              <a:rPr lang="en-US" sz="6900" dirty="0" spc="1" kern="0">
                 <a:solidFill>
                   <a:srgbClr val="F3EEE3"/>
                 </a:solidFill>
@@ -14014,10 +13904,10 @@
                 <a:ea typeface="Bricolage Grotesque ExtraBold" pitchFamily="34" charset="-122"/>
                 <a:cs typeface="Bricolage Grotesque ExtraBold" pitchFamily="34" charset="-120"/>
               </a:rPr>
-              <a:t>Sáu ý</a:t>
-            </a:r>
-            <a:r>
-              <a:rPr lang="en-US" sz="5100" dirty="0" spc="14" kern="0">
+              <a:t>Sáu</a:t>
+            </a:r>
+            <a:r>
+              <a:rPr lang="en-US" sz="6900" dirty="0" spc="-3" kern="0">
                 <a:solidFill>
                   <a:srgbClr val="F3EEE3"/>
                 </a:solidFill>
@@ -14025,10 +13915,10 @@
                 <a:ea typeface="Bricolage Grotesque ExtraBold" pitchFamily="34" charset="-122"/>
                 <a:cs typeface="Bricolage Grotesque ExtraBold" pitchFamily="34" charset="-120"/>
               </a:rPr>
-              <a:t> đứng</a:t>
-            </a:r>
-            <a:r>
-              <a:rPr lang="en-US" sz="5100" dirty="0" spc="-1" kern="0">
+              <a:t> ý</a:t>
+            </a:r>
+            <a:r>
+              <a:rPr lang="en-US" sz="6900" dirty="0" spc="18" kern="0">
                 <a:solidFill>
                   <a:srgbClr val="F3EEE3"/>
                 </a:solidFill>
@@ -14036,10 +13926,10 @@
                 <a:ea typeface="Bricolage Grotesque ExtraBold" pitchFamily="34" charset="-122"/>
                 <a:cs typeface="Bricolage Grotesque ExtraBold" pitchFamily="34" charset="-120"/>
               </a:rPr>
-              <a:t> sau</a:t>
-            </a:r>
-            <a:r>
-              <a:rPr lang="en-US" sz="5100" dirty="0" spc="1" kern="0">
+              <a:t> đứng</a:t>
+            </a:r>
+            <a:r>
+              <a:rPr lang="en-US" sz="6900" dirty="0" spc="2" kern="0">
                 <a:solidFill>
                   <a:srgbClr val="F3EEE3"/>
                 </a:solidFill>
@@ -14047,10 +13937,10 @@
                 <a:ea typeface="Bricolage Grotesque ExtraBold" pitchFamily="34" charset="-122"/>
                 <a:cs typeface="Bricolage Grotesque ExtraBold" pitchFamily="34" charset="-120"/>
               </a:rPr>
-              <a:t> bốn chỗ</a:t>
-            </a:r>
-            <a:r>
-              <a:rPr lang="en-US" sz="5100" dirty="0" spc="2" kern="0">
+              <a:t> sau</a:t>
+            </a:r>
+            <a:r>
+              <a:rPr lang="en-US" sz="6900" dirty="0" spc="1" kern="0">
                 <a:solidFill>
                   <a:srgbClr val="F3EEE3"/>
                 </a:solidFill>
@@ -14058,9 +13948,31 @@
                 <a:ea typeface="Bricolage Grotesque ExtraBold" pitchFamily="34" charset="-122"/>
                 <a:cs typeface="Bricolage Grotesque ExtraBold" pitchFamily="34" charset="-120"/>
               </a:rPr>
+              <a:t> bốn</a:t>
+            </a:r>
+            <a:r>
+              <a:rPr lang="en-US" sz="6900" dirty="0" spc="-1" kern="0">
+                <a:solidFill>
+                  <a:srgbClr val="F3EEE3"/>
+                </a:solidFill>
+                <a:latin typeface="Bricolage Grotesque ExtraBold" pitchFamily="34" charset="0"/>
+                <a:ea typeface="Bricolage Grotesque ExtraBold" pitchFamily="34" charset="-122"/>
+                <a:cs typeface="Bricolage Grotesque ExtraBold" pitchFamily="34" charset="-120"/>
+              </a:rPr>
+              <a:t> chỗ</a:t>
+            </a:r>
+            <a:r>
+              <a:rPr lang="en-US" sz="6900" dirty="0" spc="1" kern="0">
+                <a:solidFill>
+                  <a:srgbClr val="F3EEE3"/>
+                </a:solidFill>
+                <a:latin typeface="Bricolage Grotesque ExtraBold" pitchFamily="34" charset="0"/>
+                <a:ea typeface="Bricolage Grotesque ExtraBold" pitchFamily="34" charset="-122"/>
+                <a:cs typeface="Bricolage Grotesque ExtraBold" pitchFamily="34" charset="-120"/>
+              </a:rPr>
               <a:t> hỏng</a:t>
             </a:r>
-            <a:endParaRPr lang="en-US" sz="5100" dirty="0"/>
+            <a:endParaRPr lang="en-US" sz="6900" dirty="0"/>
           </a:p>
         </p:txBody>
       </p:sp>

--- a/system-design-101/vi/lessons/sd-13-013/slides/sd-13-013.pptx
+++ b/system-design-101/vi/lessons/sd-13-013/slides/sd-13-013.pptx
@@ -2729,7 +2729,7 @@
               <a:buNone/>
             </a:pPr>
             <a:r>
-              <a:rPr lang="en-US" sz="2306" b="1" dirty="0" spc="-5" kern="0">
+              <a:rPr lang="en-US" sz="2550" b="1" dirty="0" spc="-6" kern="0">
                 <a:solidFill>
                   <a:srgbClr val="F3EEE3"/>
                 </a:solidFill>
@@ -2737,10 +2737,10 @@
                 <a:ea typeface="Be Vietnam Pro" pitchFamily="34" charset="-122"/>
                 <a:cs typeface="Be Vietnam Pro" pitchFamily="34" charset="-120"/>
               </a:rPr>
-              <a:t>Container</a:t>
-            </a:r>
-            <a:r>
-              <a:rPr lang="en-US" sz="2306" b="1" dirty="0" spc="-6" kern="0">
+              <a:t>Container chết, không</a:t>
+            </a:r>
+            <a:r>
+              <a:rPr lang="en-US" sz="2550" b="1" dirty="0" spc="0" kern="0">
                 <a:solidFill>
                   <a:srgbClr val="F3EEE3"/>
                 </a:solidFill>
@@ -2748,10 +2748,10 @@
                 <a:ea typeface="Be Vietnam Pro" pitchFamily="34" charset="-122"/>
                 <a:cs typeface="Be Vietnam Pro" pitchFamily="34" charset="-120"/>
               </a:rPr>
-              <a:t> chết, không</a:t>
-            </a:r>
-            <a:r>
-              <a:rPr lang="en-US" sz="2306" b="1" dirty="0" spc="0" kern="0">
+              <a:t> tự</a:t>
+            </a:r>
+            <a:r>
+              <a:rPr lang="en-US" sz="2550" b="1" dirty="0" spc="-9" kern="0">
                 <a:solidFill>
                   <a:srgbClr val="F3EEE3"/>
                 </a:solidFill>
@@ -2759,10 +2759,10 @@
                 <a:ea typeface="Be Vietnam Pro" pitchFamily="34" charset="-122"/>
                 <a:cs typeface="Be Vietnam Pro" pitchFamily="34" charset="-120"/>
               </a:rPr>
-              <a:t> tự</a:t>
-            </a:r>
-            <a:r>
-              <a:rPr lang="en-US" sz="2306" b="1" dirty="0" spc="-5" kern="0">
+              <a:t> chạy</a:t>
+            </a:r>
+            <a:r>
+              <a:rPr lang="en-US" sz="2550" b="1" dirty="0" spc="-1" kern="0">
                 <a:solidFill>
                   <a:srgbClr val="F3EEE3"/>
                 </a:solidFill>
@@ -2770,20 +2770,9 @@
                 <a:ea typeface="Be Vietnam Pro" pitchFamily="34" charset="-122"/>
                 <a:cs typeface="Be Vietnam Pro" pitchFamily="34" charset="-120"/>
               </a:rPr>
-              <a:t> chạy</a:t>
-            </a:r>
-            <a:r>
-              <a:rPr lang="en-US" sz="2306" b="1" dirty="0" spc="-1" kern="0">
-                <a:solidFill>
-                  <a:srgbClr val="F3EEE3"/>
-                </a:solidFill>
-                <a:latin typeface="Be Vietnam Pro" pitchFamily="34" charset="0"/>
-                <a:ea typeface="Be Vietnam Pro" pitchFamily="34" charset="-122"/>
-                <a:cs typeface="Be Vietnam Pro" pitchFamily="34" charset="-120"/>
-              </a:rPr>
               <a:t> lại</a:t>
             </a:r>
-            <a:endParaRPr lang="en-US" sz="2306" dirty="0"/>
+            <a:endParaRPr lang="en-US" sz="2550" dirty="0"/>
           </a:p>
         </p:txBody>
       </p:sp>
@@ -6850,7 +6839,7 @@
               <a:buNone/>
             </a:pPr>
             <a:r>
-              <a:rPr lang="en-US" sz="2250" dirty="0" spc="-11" kern="0">
+              <a:rPr lang="en-US" sz="2550" dirty="0" spc="-10" kern="0">
                 <a:solidFill>
                   <a:srgbClr val="6B6A66"/>
                 </a:solidFill>
@@ -6861,7 +6850,7 @@
               <a:t>Image</a:t>
             </a:r>
             <a:r>
-              <a:rPr lang="en-US" sz="2250" dirty="0" spc="1" kern="0">
+              <a:rPr lang="en-US" sz="2550" dirty="0" spc="1" kern="0">
                 <a:solidFill>
                   <a:srgbClr val="6B6A66"/>
                 </a:solidFill>
@@ -6872,7 +6861,7 @@
               <a:t> chỉ</a:t>
             </a:r>
             <a:r>
-              <a:rPr lang="en-US" sz="2250" dirty="0" spc="9" kern="0">
+              <a:rPr lang="en-US" sz="2550" dirty="0" spc="7" kern="0">
                 <a:solidFill>
                   <a:srgbClr val="6B6A66"/>
                 </a:solidFill>
@@ -6883,7 +6872,7 @@
               <a:t> đọc;</a:t>
             </a:r>
             <a:r>
-              <a:rPr lang="en-US" sz="2250" dirty="0" spc="-10" kern="0">
+              <a:rPr lang="en-US" sz="2550" dirty="0" spc="-10" kern="0">
                 <a:solidFill>
                   <a:srgbClr val="6B6A66"/>
                 </a:solidFill>
@@ -6894,7 +6883,7 @@
               <a:t> container</a:t>
             </a:r>
             <a:r>
-              <a:rPr lang="en-US" sz="2250" dirty="0" spc="-1" kern="0">
+              <a:rPr lang="en-US" sz="2550" dirty="0" spc="1" kern="0">
                 <a:solidFill>
                   <a:srgbClr val="6B6A66"/>
                 </a:solidFill>
@@ -6905,7 +6894,7 @@
               <a:t> thêm</a:t>
             </a:r>
             <a:r>
-              <a:rPr lang="en-US" sz="2250" dirty="0" spc="-4" kern="0">
+              <a:rPr lang="en-US" sz="2550" dirty="0" spc="-5" kern="0">
                 <a:solidFill>
                   <a:srgbClr val="6B6A66"/>
                 </a:solidFill>
@@ -6916,7 +6905,7 @@
               <a:t> một</a:t>
             </a:r>
             <a:r>
-              <a:rPr lang="en-US" sz="2250" dirty="0" spc="3" kern="0">
+              <a:rPr lang="en-US" sz="2550" dirty="0" spc="0" kern="0">
                 <a:solidFill>
                   <a:srgbClr val="6B6A66"/>
                 </a:solidFill>
@@ -6924,10 +6913,10 @@
                 <a:ea typeface="Be Vietnam Pro" pitchFamily="34" charset="-122"/>
                 <a:cs typeface="Be Vietnam Pro" pitchFamily="34" charset="-120"/>
               </a:rPr>
-              <a:t> lớp</a:t>
-            </a:r>
-            <a:r>
-              <a:rPr lang="en-US" sz="2250" dirty="0" spc="-1" kern="0">
+              <a:t> lớp ghi</a:t>
+            </a:r>
+            <a:r>
+              <a:rPr lang="en-US" sz="2550" dirty="0" spc="8" kern="0">
                 <a:solidFill>
                   <a:srgbClr val="6B6A66"/>
                 </a:solidFill>
@@ -6935,20 +6924,9 @@
                 <a:ea typeface="Be Vietnam Pro" pitchFamily="34" charset="-122"/>
                 <a:cs typeface="Be Vietnam Pro" pitchFamily="34" charset="-120"/>
               </a:rPr>
-              <a:t> ghi</a:t>
-            </a:r>
-            <a:r>
-              <a:rPr lang="en-US" sz="2250" dirty="0" spc="6" kern="0">
-                <a:solidFill>
-                  <a:srgbClr val="6B6A66"/>
-                </a:solidFill>
-                <a:latin typeface="Be Vietnam Pro" pitchFamily="34" charset="0"/>
-                <a:ea typeface="Be Vietnam Pro" pitchFamily="34" charset="-122"/>
-                <a:cs typeface="Be Vietnam Pro" pitchFamily="34" charset="-120"/>
-              </a:rPr>
               <a:t> riêng.</a:t>
             </a:r>
-            <a:endParaRPr lang="en-US" sz="2250" dirty="0"/>
+            <a:endParaRPr lang="en-US" sz="2550" dirty="0"/>
           </a:p>
         </p:txBody>
       </p:sp>
@@ -8046,7 +8024,7 @@
               <a:buNone/>
             </a:pPr>
             <a:r>
-              <a:rPr lang="en-US" sz="2250" dirty="0" spc="-52" kern="0">
+              <a:rPr lang="en-US" sz="2550" dirty="0" spc="-57" kern="0">
                 <a:solidFill>
                   <a:srgbClr val="E4E1D8"/>
                 </a:solidFill>
@@ -8057,7 +8035,7 @@
               <a:t>Trong</a:t>
             </a:r>
             <a:r>
-              <a:rPr lang="en-US" sz="2250" dirty="0" spc="-5" kern="0">
+              <a:rPr lang="en-US" sz="2550" dirty="0" spc="-5" kern="0">
                 <a:solidFill>
                   <a:srgbClr val="E4E1D8"/>
                 </a:solidFill>
@@ -8068,7 +8046,7 @@
               <a:t> Compose,</a:t>
             </a:r>
             <a:r>
-              <a:rPr lang="en-US" sz="2250" dirty="0" spc="1" kern="0">
+              <a:rPr lang="en-US" sz="2550" dirty="0" spc="1" kern="0">
                 <a:solidFill>
                   <a:srgbClr val="E4E1D8"/>
                 </a:solidFill>
@@ -8079,7 +8057,7 @@
               <a:t> dịch</a:t>
             </a:r>
             <a:r>
-              <a:rPr lang="en-US" sz="2250" dirty="0" spc="2" kern="0">
+              <a:rPr lang="en-US" sz="2550" dirty="0" spc="-4" kern="0">
                 <a:solidFill>
                   <a:srgbClr val="E4E1D8"/>
                 </a:solidFill>
@@ -8090,7 +8068,7 @@
               <a:t> vụ</a:t>
             </a:r>
             <a:r>
-              <a:rPr lang="en-US" sz="2250" dirty="0" spc="1" kern="0">
+              <a:rPr lang="en-US" sz="2550" dirty="0" spc="1" kern="0">
                 <a:solidFill>
                   <a:srgbClr val="E4E1D8"/>
                 </a:solidFill>
@@ -8101,7 +8079,7 @@
               <a:t> chung</a:t>
             </a:r>
             <a:r>
-              <a:rPr lang="en-US" sz="2250" dirty="0" spc="-10" kern="0">
+              <a:rPr lang="en-US" sz="2550" dirty="0" spc="-8" kern="0">
                 <a:solidFill>
                   <a:srgbClr val="E4E1D8"/>
                 </a:solidFill>
@@ -8112,7 +8090,7 @@
               <a:t> network</a:t>
             </a:r>
             <a:r>
-              <a:rPr lang="en-US" sz="2250" dirty="0" spc="0" kern="0">
+              <a:rPr lang="en-US" sz="2550" dirty="0" spc="1" kern="0">
                 <a:solidFill>
                   <a:srgbClr val="E4E1D8"/>
                 </a:solidFill>
@@ -8123,7 +8101,7 @@
               <a:t> mặc</a:t>
             </a:r>
             <a:r>
-              <a:rPr lang="en-US" sz="2250" dirty="0" spc="17" kern="0">
+              <a:rPr lang="en-US" sz="2550" dirty="0" spc="18" kern="0">
                 <a:solidFill>
                   <a:srgbClr val="E4E1D8"/>
                 </a:solidFill>
@@ -8133,7 +8111,7 @@
               </a:rPr>
               <a:t> định.</a:t>
             </a:r>
-            <a:endParaRPr lang="en-US" sz="2250" dirty="0"/>
+            <a:endParaRPr lang="en-US" sz="2550" dirty="0"/>
           </a:p>
         </p:txBody>
       </p:sp>
@@ -8189,7 +8167,7 @@
               <a:buNone/>
             </a:pPr>
             <a:r>
-              <a:rPr lang="en-US" sz="2400" b="1" dirty="0" spc="-3" kern="0">
+              <a:rPr lang="en-US" sz="2550" b="1" dirty="0" spc="-5" kern="0">
                 <a:solidFill>
                   <a:srgbClr val="9AA0B5"/>
                 </a:solidFill>
@@ -8199,7 +8177,7 @@
               </a:rPr>
               <a:t>localhost:5432</a:t>
             </a:r>
-            <a:endParaRPr lang="en-US" sz="2400" dirty="0"/>
+            <a:endParaRPr lang="en-US" sz="2550" dirty="0"/>
           </a:p>
         </p:txBody>
       </p:sp>
@@ -9158,17 +9136,17 @@
           <a:ln/>
         </p:spPr>
         <p:txBody>
-          <a:bodyPr wrap="square" lIns="0" tIns="9144" rIns="0" bIns="-9144" rtlCol="0" anchor="t"/>
+          <a:bodyPr wrap="square" lIns="0" tIns="9700" rIns="0" bIns="-9700" rtlCol="0" anchor="t"/>
           <a:lstStyle/>
           <a:p>
             <a:pPr algn="l" indent="0" marL="0">
               <a:lnSpc>
-                <a:spcPts val="3240"/>
+                <a:spcPts val="3443"/>
               </a:lnSpc>
               <a:buNone/>
             </a:pPr>
             <a:r>
-              <a:rPr lang="en-US" sz="2400" dirty="0" spc="1" kern="0">
+              <a:rPr lang="en-US" sz="2550" dirty="0" spc="0" kern="0">
                 <a:solidFill>
                   <a:srgbClr val="14161C"/>
                 </a:solidFill>
@@ -9179,7 +9157,7 @@
               <a:t>Ánh</a:t>
             </a:r>
             <a:r>
-              <a:rPr lang="en-US" sz="2400" dirty="0" spc="-20" kern="0">
+              <a:rPr lang="en-US" sz="2550" dirty="0" spc="-25" kern="0">
                 <a:solidFill>
                   <a:srgbClr val="14161C"/>
                 </a:solidFill>
@@ -9190,7 +9168,7 @@
               <a:t> xạ</a:t>
             </a:r>
             <a:r>
-              <a:rPr lang="en-US" sz="2400" dirty="0" spc="-3" kern="0">
+              <a:rPr lang="en-US" sz="2550" dirty="0" spc="-5" kern="0">
                 <a:solidFill>
                   <a:srgbClr val="14161C"/>
                 </a:solidFill>
@@ -9201,7 +9179,7 @@
               <a:t> một</a:t>
             </a:r>
             <a:r>
-              <a:rPr lang="en-US" sz="2400" dirty="0" spc="1" kern="0">
+              <a:rPr lang="en-US" sz="2550" dirty="0" spc="0" kern="0">
                 <a:solidFill>
                   <a:srgbClr val="14161C"/>
                 </a:solidFill>
@@ -9212,7 +9190,7 @@
               <a:t> cổng</a:t>
             </a:r>
             <a:r>
-              <a:rPr lang="en-US" sz="2400" dirty="0" spc="2" kern="0">
+              <a:rPr lang="en-US" sz="2550" dirty="0" spc="-2" kern="0">
                 <a:solidFill>
                   <a:srgbClr val="14161C"/>
                 </a:solidFill>
@@ -9223,7 +9201,7 @@
               <a:t> cụ</a:t>
             </a:r>
             <a:r>
-              <a:rPr lang="en-US" sz="2400" dirty="0" spc="0" kern="0">
+              <a:rPr lang="en-US" sz="2550" dirty="0" spc="2" kern="0">
                 <a:solidFill>
                   <a:srgbClr val="14161C"/>
                 </a:solidFill>
@@ -9233,7 +9211,7 @@
               </a:rPr>
               <a:t> thể.</a:t>
             </a:r>
-            <a:endParaRPr lang="en-US" sz="2400" dirty="0"/>
+            <a:endParaRPr lang="en-US" sz="2550" dirty="0"/>
           </a:p>
         </p:txBody>
       </p:sp>
@@ -9321,17 +9299,17 @@
           <a:ln/>
         </p:spPr>
         <p:txBody>
-          <a:bodyPr wrap="square" lIns="0" tIns="9144" rIns="0" bIns="-9144" rtlCol="0" anchor="t"/>
+          <a:bodyPr wrap="square" lIns="0" tIns="9700" rIns="0" bIns="-9700" rtlCol="0" anchor="t"/>
           <a:lstStyle/>
           <a:p>
             <a:pPr algn="l" indent="0" marL="0">
               <a:lnSpc>
-                <a:spcPts val="3240"/>
+                <a:spcPts val="3443"/>
               </a:lnSpc>
               <a:buNone/>
             </a:pPr>
             <a:r>
-              <a:rPr lang="en-US" sz="2400" dirty="0" spc="1" kern="0">
+              <a:rPr lang="en-US" sz="2550" dirty="0" spc="1" kern="0">
                 <a:solidFill>
                   <a:srgbClr val="14161C"/>
                 </a:solidFill>
@@ -9342,7 +9320,7 @@
               <a:t>Cổng</a:t>
             </a:r>
             <a:r>
-              <a:rPr lang="en-US" sz="2400" dirty="0" spc="19" kern="0">
+              <a:rPr lang="en-US" sz="2550" dirty="0" spc="17" kern="0">
                 <a:solidFill>
                   <a:srgbClr val="14161C"/>
                 </a:solidFill>
@@ -9353,7 +9331,7 @@
               <a:t> đã</a:t>
             </a:r>
             <a:r>
-              <a:rPr lang="en-US" sz="2400" dirty="0" spc="-1" kern="0">
+              <a:rPr lang="en-US" sz="2550" dirty="0" spc="0" kern="0">
                 <a:solidFill>
                   <a:srgbClr val="14161C"/>
                 </a:solidFill>
@@ -9364,7 +9342,7 @@
               <a:t> EXPOSE</a:t>
             </a:r>
             <a:r>
-              <a:rPr lang="en-US" sz="2400" dirty="0" spc="-28" kern="0">
+              <a:rPr lang="en-US" sz="2550" dirty="0" spc="-34" kern="0">
                 <a:solidFill>
                   <a:srgbClr val="14161C"/>
                 </a:solidFill>
@@ -9375,7 +9353,7 @@
               <a:t> ra</a:t>
             </a:r>
             <a:r>
-              <a:rPr lang="en-US" sz="2400" dirty="0" spc="1" kern="0">
+              <a:rPr lang="en-US" sz="2550" dirty="0" spc="0" kern="0">
                 <a:solidFill>
                   <a:srgbClr val="14161C"/>
                 </a:solidFill>
@@ -9386,7 +9364,7 @@
               <a:t> cổng</a:t>
             </a:r>
             <a:r>
-              <a:rPr lang="en-US" sz="2400" dirty="0" spc="-8" kern="0">
+              <a:rPr lang="en-US" sz="2550" dirty="0" spc="-8" kern="0">
                 <a:solidFill>
                   <a:srgbClr val="14161C"/>
                 </a:solidFill>
@@ -9397,7 +9375,7 @@
               <a:t> ngẫu</a:t>
             </a:r>
             <a:r>
-              <a:rPr lang="en-US" sz="2400" dirty="0" spc="0" kern="0">
+              <a:rPr lang="en-US" sz="2550" dirty="0" spc="0" kern="0">
                 <a:solidFill>
                   <a:srgbClr val="14161C"/>
                 </a:solidFill>
@@ -9407,7 +9385,7 @@
               </a:rPr>
               <a:t> nhiên.</a:t>
             </a:r>
-            <a:endParaRPr lang="en-US" sz="2400" dirty="0"/>
+            <a:endParaRPr lang="en-US" sz="2550" dirty="0"/>
           </a:p>
         </p:txBody>
       </p:sp>
@@ -9506,17 +9484,17 @@
           <a:ln/>
         </p:spPr>
         <p:txBody>
-          <a:bodyPr wrap="square" lIns="0" tIns="9144" rIns="0" bIns="-9144" rtlCol="0" anchor="t"/>
+          <a:bodyPr wrap="square" lIns="0" tIns="9700" rIns="0" bIns="-9700" rtlCol="0" anchor="t"/>
           <a:lstStyle/>
           <a:p>
             <a:pPr algn="l" indent="0" marL="0">
               <a:lnSpc>
-                <a:spcPts val="3240"/>
+                <a:spcPts val="3443"/>
               </a:lnSpc>
               <a:buNone/>
             </a:pPr>
             <a:r>
-              <a:rPr lang="en-US" sz="2400" dirty="0" spc="2" kern="0">
+              <a:rPr lang="en-US" sz="2550" dirty="0" spc="-1" kern="0">
                 <a:solidFill>
                   <a:srgbClr val="14161C"/>
                 </a:solidFill>
@@ -9524,10 +9502,10 @@
                 <a:ea typeface="Be Vietnam Pro" pitchFamily="34" charset="-122"/>
                 <a:cs typeface="Be Vietnam Pro" pitchFamily="34" charset="-120"/>
               </a:rPr>
-              <a:t>Không</a:t>
-            </a:r>
-            <a:r>
-              <a:rPr lang="en-US" sz="2400" dirty="0" spc="4" kern="0">
+              <a:t>Không tự publish;</a:t>
+            </a:r>
+            <a:r>
+              <a:rPr lang="en-US" sz="2550" dirty="0" spc="-10" kern="0">
                 <a:solidFill>
                   <a:srgbClr val="14161C"/>
                 </a:solidFill>
@@ -9535,10 +9513,10 @@
                 <a:ea typeface="Be Vietnam Pro" pitchFamily="34" charset="-122"/>
                 <a:cs typeface="Be Vietnam Pro" pitchFamily="34" charset="-120"/>
               </a:rPr>
-              <a:t> tự</a:t>
-            </a:r>
-            <a:r>
-              <a:rPr lang="en-US" sz="2400" dirty="0" spc="-1" kern="0">
+              <a:t> ngoài</a:t>
+            </a:r>
+            <a:r>
+              <a:rPr lang="en-US" sz="2550" dirty="0" spc="0" kern="0">
                 <a:solidFill>
                   <a:srgbClr val="14161C"/>
                 </a:solidFill>
@@ -9546,10 +9524,10 @@
                 <a:ea typeface="Be Vietnam Pro" pitchFamily="34" charset="-122"/>
                 <a:cs typeface="Be Vietnam Pro" pitchFamily="34" charset="-120"/>
               </a:rPr>
-              <a:t> publish;</a:t>
-            </a:r>
-            <a:r>
-              <a:rPr lang="en-US" sz="2400" dirty="0" spc="-8" kern="0">
+              <a:t> không</a:t>
+            </a:r>
+            <a:r>
+              <a:rPr lang="en-US" sz="2550" dirty="0" spc="-10" kern="0">
                 <a:solidFill>
                   <a:srgbClr val="14161C"/>
                 </a:solidFill>
@@ -9557,31 +9535,9 @@
                 <a:ea typeface="Be Vietnam Pro" pitchFamily="34" charset="-122"/>
                 <a:cs typeface="Be Vietnam Pro" pitchFamily="34" charset="-120"/>
               </a:rPr>
-              <a:t> ngoài</a:t>
-            </a:r>
-            <a:r>
-              <a:rPr lang="en-US" sz="2400" dirty="0" spc="1" kern="0">
-                <a:solidFill>
-                  <a:srgbClr val="14161C"/>
-                </a:solidFill>
-                <a:latin typeface="Be Vietnam Pro" pitchFamily="34" charset="0"/>
-                <a:ea typeface="Be Vietnam Pro" pitchFamily="34" charset="-122"/>
-                <a:cs typeface="Be Vietnam Pro" pitchFamily="34" charset="-120"/>
-              </a:rPr>
-              <a:t> không</a:t>
-            </a:r>
-            <a:r>
-              <a:rPr lang="en-US" sz="2400" dirty="0" spc="-9" kern="0">
-                <a:solidFill>
-                  <a:srgbClr val="14161C"/>
-                </a:solidFill>
-                <a:latin typeface="Be Vietnam Pro" pitchFamily="34" charset="0"/>
-                <a:ea typeface="Be Vietnam Pro" pitchFamily="34" charset="-122"/>
-                <a:cs typeface="Be Vietnam Pro" pitchFamily="34" charset="-120"/>
-              </a:rPr>
               <a:t> vào.</a:t>
             </a:r>
-            <a:endParaRPr lang="en-US" sz="2400" dirty="0"/>
+            <a:endParaRPr lang="en-US" sz="2550" dirty="0"/>
           </a:p>
         </p:txBody>
       </p:sp>
@@ -9680,17 +9636,17 @@
           <a:ln/>
         </p:spPr>
         <p:txBody>
-          <a:bodyPr wrap="square" lIns="0" tIns="9144" rIns="0" bIns="-9144" rtlCol="0" anchor="t"/>
+          <a:bodyPr wrap="square" lIns="0" tIns="9700" rIns="0" bIns="-9700" rtlCol="0" anchor="t"/>
           <a:lstStyle/>
           <a:p>
             <a:pPr algn="l" indent="0" marL="0">
               <a:lnSpc>
-                <a:spcPts val="3240"/>
+                <a:spcPts val="3443"/>
               </a:lnSpc>
               <a:buNone/>
             </a:pPr>
             <a:r>
-              <a:rPr lang="en-US" sz="2400" dirty="0" spc="2" kern="0">
+              <a:rPr lang="en-US" sz="2550" dirty="0" spc="-3" kern="0">
                 <a:solidFill>
                   <a:srgbClr val="14161C"/>
                 </a:solidFill>
@@ -9701,7 +9657,7 @@
               <a:t>Dùng</a:t>
             </a:r>
             <a:r>
-              <a:rPr lang="en-US" sz="2400" dirty="0" spc="4" kern="0">
+              <a:rPr lang="en-US" sz="2550" dirty="0" spc="1" kern="0">
                 <a:solidFill>
                   <a:srgbClr val="14161C"/>
                 </a:solidFill>
@@ -9712,7 +9668,7 @@
               <a:t> mạng</a:t>
             </a:r>
             <a:r>
-              <a:rPr lang="en-US" sz="2400" dirty="0" spc="-6" kern="0">
+              <a:rPr lang="en-US" sz="2550" dirty="0" spc="-9" kern="0">
                 <a:solidFill>
                   <a:srgbClr val="14161C"/>
                 </a:solidFill>
@@ -9723,7 +9679,7 @@
               <a:t> máy</a:t>
             </a:r>
             <a:r>
-              <a:rPr lang="en-US" sz="2400" dirty="0" spc="1" kern="0">
+              <a:rPr lang="en-US" sz="2550" dirty="0" spc="-1" kern="0">
                 <a:solidFill>
                   <a:srgbClr val="14161C"/>
                 </a:solidFill>
@@ -9734,7 +9690,7 @@
               <a:t> chủ,</a:t>
             </a:r>
             <a:r>
-              <a:rPr lang="en-US" sz="2400" dirty="0" spc="-2" kern="0">
+              <a:rPr lang="en-US" sz="2550" dirty="0" spc="-5" kern="0">
                 <a:solidFill>
                   <a:srgbClr val="14161C"/>
                 </a:solidFill>
@@ -9745,7 +9701,7 @@
               <a:t> bỏ</a:t>
             </a:r>
             <a:r>
-              <a:rPr lang="en-US" sz="2400" dirty="0" spc="1" kern="0">
+              <a:rPr lang="en-US" sz="2550" dirty="0" spc="1" kern="0">
                 <a:solidFill>
                   <a:srgbClr val="14161C"/>
                 </a:solidFill>
@@ -9756,7 +9712,7 @@
               <a:t> qua</a:t>
             </a:r>
             <a:r>
-              <a:rPr lang="en-US" sz="2400" dirty="0" spc="-1" kern="0">
+              <a:rPr lang="en-US" sz="2550" dirty="0" spc="0" kern="0">
                 <a:solidFill>
                   <a:srgbClr val="14161C"/>
                 </a:solidFill>
@@ -9766,7 +9722,7 @@
               </a:rPr>
               <a:t> publish.</a:t>
             </a:r>
-            <a:endParaRPr lang="en-US" sz="2400" dirty="0"/>
+            <a:endParaRPr lang="en-US" sz="2550" dirty="0"/>
           </a:p>
         </p:txBody>
       </p:sp>
@@ -11514,7 +11470,7 @@
               <a:buNone/>
             </a:pPr>
             <a:r>
-              <a:rPr lang="en-US" sz="2400" dirty="0" spc="-18" kern="0">
+              <a:rPr lang="en-US" sz="2550" dirty="0" spc="-17" kern="0">
                 <a:solidFill>
                   <a:srgbClr val="F3EEE3"/>
                 </a:solidFill>
@@ -11525,7 +11481,7 @@
               <a:t>Volume</a:t>
             </a:r>
             <a:r>
-              <a:rPr lang="en-US" sz="2400" dirty="0" spc="2" kern="0">
+              <a:rPr lang="en-US" sz="2550" dirty="0" spc="-2" kern="0">
                 <a:solidFill>
                   <a:srgbClr val="F3EEE3"/>
                 </a:solidFill>
@@ -11533,10 +11489,10 @@
                 <a:ea typeface="Be Vietnam Pro" pitchFamily="34" charset="-122"/>
                 <a:cs typeface="Be Vietnam Pro" pitchFamily="34" charset="-120"/>
               </a:rPr>
-              <a:t> giữ</a:t>
-            </a:r>
-            <a:r>
-              <a:rPr lang="en-US" sz="2400" dirty="0" spc="4" kern="0">
+              <a:t> giữ dữ</a:t>
+            </a:r>
+            <a:r>
+              <a:rPr lang="en-US" sz="2550" dirty="0" spc="1" kern="0">
                 <a:solidFill>
                   <a:srgbClr val="F3EEE3"/>
                 </a:solidFill>
@@ -11544,10 +11500,10 @@
                 <a:ea typeface="Be Vietnam Pro" pitchFamily="34" charset="-122"/>
                 <a:cs typeface="Be Vietnam Pro" pitchFamily="34" charset="-120"/>
               </a:rPr>
-              <a:t> dữ</a:t>
-            </a:r>
-            <a:r>
-              <a:rPr lang="en-US" sz="2400" dirty="0" spc="-2" kern="0">
+              <a:t> liệu</a:t>
+            </a:r>
+            <a:r>
+              <a:rPr lang="en-US" sz="2550" dirty="0" spc="0" kern="0">
                 <a:solidFill>
                   <a:srgbClr val="F3EEE3"/>
                 </a:solidFill>
@@ -11555,10 +11511,10 @@
                 <a:ea typeface="Be Vietnam Pro" pitchFamily="34" charset="-122"/>
                 <a:cs typeface="Be Vietnam Pro" pitchFamily="34" charset="-120"/>
               </a:rPr>
-              <a:t> liệu khi</a:t>
-            </a:r>
-            <a:r>
-              <a:rPr lang="en-US" sz="2400" dirty="0" spc="-18" kern="0">
+              <a:t> khi</a:t>
+            </a:r>
+            <a:r>
+              <a:rPr lang="en-US" sz="2550" dirty="0" spc="-23" kern="0">
                 <a:solidFill>
                   <a:srgbClr val="F3EEE3"/>
                 </a:solidFill>
@@ -11569,7 +11525,7 @@
               <a:t> xóa</a:t>
             </a:r>
             <a:r>
-              <a:rPr lang="en-US" sz="2400" dirty="0" spc="-8" kern="0">
+              <a:rPr lang="en-US" sz="2550" dirty="0" spc="-9" kern="0">
                 <a:solidFill>
                   <a:srgbClr val="F3EEE3"/>
                 </a:solidFill>
@@ -11579,7 +11535,7 @@
               </a:rPr>
               <a:t> container.</a:t>
             </a:r>
-            <a:endParaRPr lang="en-US" sz="2400" dirty="0"/>
+            <a:endParaRPr lang="en-US" sz="2550" dirty="0"/>
           </a:p>
         </p:txBody>
       </p:sp>
@@ -11635,7 +11591,7 @@
               <a:buNone/>
             </a:pPr>
             <a:r>
-              <a:rPr lang="en-US" sz="2400" b="1" dirty="0" spc="-28" kern="0">
+              <a:rPr lang="en-US" sz="2550" b="1" dirty="0" spc="-31" kern="0">
                 <a:solidFill>
                   <a:srgbClr val="F3EEE3"/>
                 </a:solidFill>
@@ -11646,7 +11602,7 @@
               <a:t>Volume</a:t>
             </a:r>
             <a:r>
-              <a:rPr lang="en-US" sz="2400" b="1" dirty="0" spc="-8" kern="0">
+              <a:rPr lang="en-US" sz="2550" b="1" dirty="0" spc="-6" kern="0">
                 <a:solidFill>
                   <a:srgbClr val="F3EEE3"/>
                 </a:solidFill>
@@ -11657,7 +11613,7 @@
               <a:t> không</a:t>
             </a:r>
             <a:r>
-              <a:rPr lang="en-US" sz="2400" b="1" dirty="0" spc="-9" kern="0">
+              <a:rPr lang="en-US" sz="2550" b="1" dirty="0" spc="-8" kern="0">
                 <a:solidFill>
                   <a:srgbClr val="F3EEE3"/>
                 </a:solidFill>
@@ -11668,7 +11624,7 @@
               <a:t> thay</a:t>
             </a:r>
             <a:r>
-              <a:rPr lang="en-US" sz="2400" b="1" dirty="0" spc="-4" kern="0">
+              <a:rPr lang="en-US" sz="2550" b="1" dirty="0" spc="-3" kern="0">
                 <a:solidFill>
                   <a:srgbClr val="F3EEE3"/>
                 </a:solidFill>
@@ -11679,7 +11635,7 @@
               <a:t> cho</a:t>
             </a:r>
             <a:r>
-              <a:rPr lang="en-US" sz="2400" b="1" dirty="0" spc="4" kern="0">
+              <a:rPr lang="en-US" sz="2550" b="1" dirty="0" spc="1" kern="0">
                 <a:solidFill>
                   <a:srgbClr val="F3EEE3"/>
                 </a:solidFill>
@@ -11690,7 +11646,7 @@
               <a:t> sao</a:t>
             </a:r>
             <a:r>
-              <a:rPr lang="en-US" sz="2400" b="1" dirty="0" spc="27" kern="0">
+              <a:rPr lang="en-US" sz="2550" b="1" dirty="0" spc="27" kern="0">
                 <a:solidFill>
                   <a:srgbClr val="F3EEE3"/>
                 </a:solidFill>
@@ -11700,7 +11656,7 @@
               </a:rPr>
               <a:t> lưu.</a:t>
             </a:r>
-            <a:endParaRPr lang="en-US" sz="2400" dirty="0"/>
+            <a:endParaRPr lang="en-US" sz="2550" dirty="0"/>
           </a:p>
         </p:txBody>
       </p:sp>
@@ -11756,7 +11712,7 @@
               <a:buNone/>
             </a:pPr>
             <a:r>
-              <a:rPr lang="en-US" sz="2400" dirty="0" spc="-10" kern="0">
+              <a:rPr lang="en-US" sz="2550" dirty="0" spc="-11" kern="0">
                 <a:solidFill>
                   <a:srgbClr val="F3EEE3"/>
                 </a:solidFill>
@@ -11767,7 +11723,7 @@
               <a:t>Container</a:t>
             </a:r>
             <a:r>
-              <a:rPr lang="en-US" sz="2400" dirty="0" spc="7" kern="0">
+              <a:rPr lang="en-US" sz="2550" dirty="0" spc="6" kern="0">
                 <a:solidFill>
                   <a:srgbClr val="F3EEE3"/>
                 </a:solidFill>
@@ -11778,7 +11734,7 @@
               <a:t> được</a:t>
             </a:r>
             <a:r>
-              <a:rPr lang="en-US" sz="2400" dirty="0" spc="-1" kern="0">
+              <a:rPr lang="en-US" sz="2550" dirty="0" spc="0" kern="0">
                 <a:solidFill>
                   <a:srgbClr val="F3EEE3"/>
                 </a:solidFill>
@@ -11789,7 +11745,7 @@
               <a:t> cô</a:t>
             </a:r>
             <a:r>
-              <a:rPr lang="en-US" sz="2400" dirty="0" spc="2" kern="0">
+              <a:rPr lang="en-US" sz="2550" dirty="0" spc="1" kern="0">
                 <a:solidFill>
                   <a:srgbClr val="F3EEE3"/>
                 </a:solidFill>
@@ -11800,7 +11756,7 @@
               <a:t> lập</a:t>
             </a:r>
             <a:r>
-              <a:rPr lang="en-US" sz="2400" dirty="0" spc="-1" kern="0">
+              <a:rPr lang="en-US" sz="2550" dirty="0" spc="-2" kern="0">
                 <a:solidFill>
                   <a:srgbClr val="F3EEE3"/>
                 </a:solidFill>
@@ -11811,7 +11767,7 @@
               <a:t> theo</a:t>
             </a:r>
             <a:r>
-              <a:rPr lang="en-US" sz="2400" dirty="0" spc="0" kern="0">
+              <a:rPr lang="en-US" sz="2550" dirty="0" spc="2" kern="0">
                 <a:solidFill>
                   <a:srgbClr val="F3EEE3"/>
                 </a:solidFill>
@@ -11819,9 +11775,20 @@
                 <a:ea typeface="Be Vietnam Pro" pitchFamily="34" charset="-122"/>
                 <a:cs typeface="Be Vietnam Pro" pitchFamily="34" charset="-120"/>
               </a:rPr>
-              <a:t> cấu hình.</a:t>
-            </a:r>
-            <a:endParaRPr lang="en-US" sz="2400" dirty="0"/>
+              <a:t> cấu</a:t>
+            </a:r>
+            <a:r>
+              <a:rPr lang="en-US" sz="2550" dirty="0" spc="1" kern="0">
+                <a:solidFill>
+                  <a:srgbClr val="F3EEE3"/>
+                </a:solidFill>
+                <a:latin typeface="Be Vietnam Pro" pitchFamily="34" charset="0"/>
+                <a:ea typeface="Be Vietnam Pro" pitchFamily="34" charset="-122"/>
+                <a:cs typeface="Be Vietnam Pro" pitchFamily="34" charset="-120"/>
+              </a:rPr>
+              <a:t> hình.</a:t>
+            </a:r>
+            <a:endParaRPr lang="en-US" sz="2550" dirty="0"/>
           </a:p>
         </p:txBody>
       </p:sp>
@@ -11877,7 +11844,7 @@
               <a:buNone/>
             </a:pPr>
             <a:r>
-              <a:rPr lang="en-US" sz="2400" b="1" dirty="0" spc="-9" kern="0">
+              <a:rPr lang="en-US" sz="2550" b="1" dirty="0" spc="-7" kern="0">
                 <a:solidFill>
                   <a:srgbClr val="F3EEE3"/>
                 </a:solidFill>
@@ -11888,7 +11855,7 @@
               <a:t>Không</a:t>
             </a:r>
             <a:r>
-              <a:rPr lang="en-US" sz="2400" b="1" dirty="0" spc="-4" kern="0">
+              <a:rPr lang="en-US" sz="2550" b="1" dirty="0" spc="-3" kern="0">
                 <a:solidFill>
                   <a:srgbClr val="F3EEE3"/>
                 </a:solidFill>
@@ -11896,10 +11863,10 @@
                 <a:ea typeface="Be Vietnam Pro" pitchFamily="34" charset="-122"/>
                 <a:cs typeface="Be Vietnam Pro" pitchFamily="34" charset="-120"/>
               </a:rPr>
-              <a:t> phải</a:t>
-            </a:r>
-            <a:r>
-              <a:rPr lang="en-US" sz="2400" b="1" dirty="0" spc="-5" kern="0">
+              <a:t> phải hàng</a:t>
+            </a:r>
+            <a:r>
+              <a:rPr lang="en-US" sz="2550" b="1" dirty="0" spc="-10" kern="0">
                 <a:solidFill>
                   <a:srgbClr val="F3EEE3"/>
                 </a:solidFill>
@@ -11907,10 +11874,10 @@
                 <a:ea typeface="Be Vietnam Pro" pitchFamily="34" charset="-122"/>
                 <a:cs typeface="Be Vietnam Pro" pitchFamily="34" charset="-120"/>
               </a:rPr>
-              <a:t> hàng</a:t>
-            </a:r>
-            <a:r>
-              <a:rPr lang="en-US" sz="2400" b="1" dirty="0" spc="-6" kern="0">
+              <a:t> rào</a:t>
+            </a:r>
+            <a:r>
+              <a:rPr lang="en-US" sz="2550" b="1" dirty="0" spc="3" kern="0">
                 <a:solidFill>
                   <a:srgbClr val="F3EEE3"/>
                 </a:solidFill>
@@ -11918,10 +11885,10 @@
                 <a:ea typeface="Be Vietnam Pro" pitchFamily="34" charset="-122"/>
                 <a:cs typeface="Be Vietnam Pro" pitchFamily="34" charset="-120"/>
               </a:rPr>
-              <a:t> rào</a:t>
-            </a:r>
-            <a:r>
-              <a:rPr lang="en-US" sz="2400" b="1" dirty="0" spc="4" kern="0">
+              <a:t> bảo</a:t>
+            </a:r>
+            <a:r>
+              <a:rPr lang="en-US" sz="2550" b="1" dirty="0" spc="-8" kern="0">
                 <a:solidFill>
                   <a:srgbClr val="F3EEE3"/>
                 </a:solidFill>
@@ -11929,10 +11896,10 @@
                 <a:ea typeface="Be Vietnam Pro" pitchFamily="34" charset="-122"/>
                 <a:cs typeface="Be Vietnam Pro" pitchFamily="34" charset="-120"/>
               </a:rPr>
-              <a:t> bảo</a:t>
-            </a:r>
-            <a:r>
-              <a:rPr lang="en-US" sz="2400" b="1" dirty="0" spc="-7" kern="0">
+              <a:t> mật</a:t>
+            </a:r>
+            <a:r>
+              <a:rPr lang="en-US" sz="2550" b="1" dirty="0" spc="-17" kern="0">
                 <a:solidFill>
                   <a:srgbClr val="F3EEE3"/>
                 </a:solidFill>
@@ -11940,10 +11907,10 @@
                 <a:ea typeface="Be Vietnam Pro" pitchFamily="34" charset="-122"/>
                 <a:cs typeface="Be Vietnam Pro" pitchFamily="34" charset="-120"/>
               </a:rPr>
-              <a:t> mật</a:t>
-            </a:r>
-            <a:r>
-              <a:rPr lang="en-US" sz="2400" b="1" dirty="0" spc="-18" kern="0">
+              <a:t> tuyệt</a:t>
+            </a:r>
+            <a:r>
+              <a:rPr lang="en-US" sz="2550" b="1" dirty="0" spc="5" kern="0">
                 <a:solidFill>
                   <a:srgbClr val="F3EEE3"/>
                 </a:solidFill>
@@ -11951,20 +11918,9 @@
                 <a:ea typeface="Be Vietnam Pro" pitchFamily="34" charset="-122"/>
                 <a:cs typeface="Be Vietnam Pro" pitchFamily="34" charset="-120"/>
               </a:rPr>
-              <a:t> tuyệt</a:t>
-            </a:r>
-            <a:r>
-              <a:rPr lang="en-US" sz="2400" b="1" dirty="0" spc="7" kern="0">
-                <a:solidFill>
-                  <a:srgbClr val="F3EEE3"/>
-                </a:solidFill>
-                <a:latin typeface="Be Vietnam Pro" pitchFamily="34" charset="0"/>
-                <a:ea typeface="Be Vietnam Pro" pitchFamily="34" charset="-122"/>
-                <a:cs typeface="Be Vietnam Pro" pitchFamily="34" charset="-120"/>
-              </a:rPr>
               <a:t> đối.</a:t>
             </a:r>
-            <a:endParaRPr lang="en-US" sz="2400" dirty="0"/>
+            <a:endParaRPr lang="en-US" sz="2550" dirty="0"/>
           </a:p>
         </p:txBody>
       </p:sp>
@@ -12020,7 +11976,7 @@
               <a:buNone/>
             </a:pPr>
             <a:r>
-              <a:rPr lang="en-US" sz="2400" dirty="0" spc="2" kern="0">
+              <a:rPr lang="en-US" sz="2550" dirty="0" spc="2" kern="0">
                 <a:solidFill>
                   <a:srgbClr val="F3EEE3"/>
                 </a:solidFill>
@@ -12031,7 +11987,7 @@
               <a:t>Bài</a:t>
             </a:r>
             <a:r>
-              <a:rPr lang="en-US" sz="2400" dirty="0" spc="0" kern="0">
+              <a:rPr lang="en-US" sz="2550" dirty="0" spc="0" kern="0">
                 <a:solidFill>
                   <a:srgbClr val="F3EEE3"/>
                 </a:solidFill>
@@ -12042,7 +11998,7 @@
               <a:t> chọn</a:t>
             </a:r>
             <a:r>
-              <a:rPr lang="en-US" sz="2400" dirty="0" spc="-1" kern="0">
+              <a:rPr lang="en-US" sz="2550" dirty="0" spc="-4" kern="0">
                 <a:solidFill>
                   <a:srgbClr val="F3EEE3"/>
                 </a:solidFill>
@@ -12053,7 +12009,7 @@
               <a:t> bốn</a:t>
             </a:r>
             <a:r>
-              <a:rPr lang="en-US" sz="2400" dirty="0" spc="0" kern="0">
+              <a:rPr lang="en-US" sz="2550" dirty="0" spc="0" kern="0">
                 <a:solidFill>
                   <a:srgbClr val="F3EEE3"/>
                 </a:solidFill>
@@ -12061,10 +12017,10 @@
                 <a:ea typeface="Be Vietnam Pro" pitchFamily="34" charset="-122"/>
                 <a:cs typeface="Be Vietnam Pro" pitchFamily="34" charset="-120"/>
               </a:rPr>
-              <a:t> chỗ</a:t>
-            </a:r>
-            <a:r>
-              <a:rPr lang="en-US" sz="2400" dirty="0" spc="2" kern="0">
+              <a:t> chỗ hỏng</a:t>
+            </a:r>
+            <a:r>
+              <a:rPr lang="en-US" sz="2550" dirty="0" spc="-11" kern="0">
                 <a:solidFill>
                   <a:srgbClr val="F3EEE3"/>
                 </a:solidFill>
@@ -12072,10 +12028,10 @@
                 <a:ea typeface="Be Vietnam Pro" pitchFamily="34" charset="-122"/>
                 <a:cs typeface="Be Vietnam Pro" pitchFamily="34" charset="-120"/>
               </a:rPr>
-              <a:t> hỏng</a:t>
-            </a:r>
-            <a:r>
-              <a:rPr lang="en-US" sz="2400" dirty="0" spc="-9" kern="0">
+              <a:t> hay</a:t>
+            </a:r>
+            <a:r>
+              <a:rPr lang="en-US" sz="2550" dirty="0" spc="-9" kern="0">
                 <a:solidFill>
                   <a:srgbClr val="F3EEE3"/>
                 </a:solidFill>
@@ -12083,20 +12039,9 @@
                 <a:ea typeface="Be Vietnam Pro" pitchFamily="34" charset="-122"/>
                 <a:cs typeface="Be Vietnam Pro" pitchFamily="34" charset="-120"/>
               </a:rPr>
-              <a:t> hay</a:t>
-            </a:r>
-            <a:r>
-              <a:rPr lang="en-US" sz="2400" dirty="0" spc="-7" kern="0">
-                <a:solidFill>
-                  <a:srgbClr val="F3EEE3"/>
-                </a:solidFill>
-                <a:latin typeface="Be Vietnam Pro" pitchFamily="34" charset="0"/>
-                <a:ea typeface="Be Vietnam Pro" pitchFamily="34" charset="-122"/>
-                <a:cs typeface="Be Vietnam Pro" pitchFamily="34" charset="-120"/>
-              </a:rPr>
               <a:t> gặp.</a:t>
             </a:r>
-            <a:endParaRPr lang="en-US" sz="2400" dirty="0"/>
+            <a:endParaRPr lang="en-US" sz="2550" dirty="0"/>
           </a:p>
         </p:txBody>
       </p:sp>
@@ -12152,7 +12097,7 @@
               <a:buNone/>
             </a:pPr>
             <a:r>
-              <a:rPr lang="en-US" sz="2400" b="1" dirty="0" spc="-9" kern="0">
+              <a:rPr lang="en-US" sz="2550" b="1" dirty="0" spc="-7" kern="0">
                 <a:solidFill>
                   <a:srgbClr val="F3EEE3"/>
                 </a:solidFill>
@@ -12163,7 +12108,7 @@
               <a:t>Không</a:t>
             </a:r>
             <a:r>
-              <a:rPr lang="en-US" sz="2400" b="1" dirty="0" spc="-4" kern="0">
+              <a:rPr lang="en-US" sz="2550" b="1" dirty="0" spc="-3" kern="0">
                 <a:solidFill>
                   <a:srgbClr val="F3EEE3"/>
                 </a:solidFill>
@@ -12174,7 +12119,7 @@
               <a:t> phải</a:t>
             </a:r>
             <a:r>
-              <a:rPr lang="en-US" sz="2400" b="1" dirty="0" spc="-2" kern="0">
+              <a:rPr lang="en-US" sz="2550" b="1" dirty="0" spc="-2" kern="0">
                 <a:solidFill>
                   <a:srgbClr val="F3EEE3"/>
                 </a:solidFill>
@@ -12185,7 +12130,7 @@
               <a:t> mọi</a:t>
             </a:r>
             <a:r>
-              <a:rPr lang="en-US" sz="2400" b="1" dirty="0" spc="-1" kern="0">
+              <a:rPr lang="en-US" sz="2550" b="1" dirty="0" spc="0" kern="0">
                 <a:solidFill>
                   <a:srgbClr val="F3EEE3"/>
                 </a:solidFill>
@@ -12196,7 +12141,7 @@
               <a:t> khái</a:t>
             </a:r>
             <a:r>
-              <a:rPr lang="en-US" sz="2400" b="1" dirty="0" spc="-4" kern="0">
+              <a:rPr lang="en-US" sz="2550" b="1" dirty="0" spc="-3" kern="0">
                 <a:solidFill>
                   <a:srgbClr val="F3EEE3"/>
                 </a:solidFill>
@@ -12207,7 +12152,7 @@
               <a:t> niệm</a:t>
             </a:r>
             <a:r>
-              <a:rPr lang="en-US" sz="2400" b="1" dirty="0" spc="-12" kern="0">
+              <a:rPr lang="en-US" sz="2550" b="1" dirty="0" spc="-13" kern="0">
                 <a:solidFill>
                   <a:srgbClr val="F3EEE3"/>
                 </a:solidFill>
@@ -12217,7 +12162,7 @@
               </a:rPr>
               <a:t> Docker.</a:t>
             </a:r>
-            <a:endParaRPr lang="en-US" sz="2400" dirty="0"/>
+            <a:endParaRPr lang="en-US" sz="2550" dirty="0"/>
           </a:p>
         </p:txBody>
       </p:sp>
@@ -13033,17 +12978,17 @@
           <a:ln/>
         </p:spPr>
         <p:txBody>
-          <a:bodyPr wrap="square" lIns="0" tIns="8557" rIns="0" bIns="-8557" rtlCol="0" anchor="t"/>
+          <a:bodyPr wrap="square" lIns="0" tIns="9700" rIns="0" bIns="-9700" rtlCol="0" anchor="t"/>
           <a:lstStyle/>
           <a:p>
             <a:pPr algn="l" indent="0" marL="0">
               <a:lnSpc>
-                <a:spcPts val="3038"/>
+                <a:spcPts val="3443"/>
               </a:lnSpc>
               <a:buNone/>
             </a:pPr>
             <a:r>
-              <a:rPr lang="en-US" sz="2250" dirty="0" spc="-3" kern="0">
+              <a:rPr lang="en-US" sz="2550" dirty="0" spc="-4" kern="0">
                 <a:solidFill>
                   <a:srgbClr val="14161C"/>
                 </a:solidFill>
@@ -13054,7 +12999,7 @@
               <a:t>localhost:5432</a:t>
             </a:r>
             <a:r>
-              <a:rPr lang="en-US" sz="2250" dirty="0" spc="-22" kern="0">
+              <a:rPr lang="en-US" sz="2550" dirty="0" spc="-23" kern="0">
                 <a:solidFill>
                   <a:srgbClr val="14161C"/>
                 </a:solidFill>
@@ -13065,7 +13010,7 @@
               <a:t> trỏ</a:t>
             </a:r>
             <a:r>
-              <a:rPr lang="en-US" sz="2250" dirty="0" spc="-16" kern="0">
+              <a:rPr lang="en-US" sz="2550" dirty="0" spc="-19" kern="0">
                 <a:solidFill>
                   <a:srgbClr val="14161C"/>
                 </a:solidFill>
@@ -13076,7 +13021,7 @@
               <a:t> về</a:t>
             </a:r>
             <a:r>
-              <a:rPr lang="en-US" sz="2250" dirty="0" spc="1" kern="0">
+              <a:rPr lang="en-US" sz="2550" dirty="0" spc="0" kern="0">
                 <a:solidFill>
                   <a:srgbClr val="14161C"/>
                 </a:solidFill>
@@ -13087,7 +13032,7 @@
               <a:t> chính</a:t>
             </a:r>
             <a:r>
-              <a:rPr lang="en-US" sz="2250" dirty="0" spc="-10" kern="0">
+              <a:rPr lang="en-US" sz="2550" dirty="0" spc="-10" kern="0">
                 <a:solidFill>
                   <a:srgbClr val="14161C"/>
                 </a:solidFill>
@@ -13098,7 +13043,7 @@
               <a:t> container</a:t>
             </a:r>
             <a:r>
-              <a:rPr lang="en-US" sz="2250" dirty="0" spc="-8" kern="0">
+              <a:rPr lang="en-US" sz="2550" dirty="0" spc="-8" kern="0">
                 <a:solidFill>
                   <a:srgbClr val="14161C"/>
                 </a:solidFill>
@@ -13108,7 +13053,7 @@
               </a:rPr>
               <a:t> web.</a:t>
             </a:r>
-            <a:endParaRPr lang="en-US" sz="2250" dirty="0"/>
+            <a:endParaRPr lang="en-US" sz="2550" dirty="0"/>
           </a:p>
         </p:txBody>
       </p:sp>
@@ -13162,7 +13107,7 @@
               <a:buNone/>
             </a:pPr>
             <a:r>
-              <a:rPr lang="en-US" sz="2250" b="1" dirty="0" spc="1" kern="0">
+              <a:rPr lang="en-US" sz="2550" b="1" dirty="0" spc="2" kern="0">
                 <a:solidFill>
                   <a:srgbClr val="E8472B"/>
                 </a:solidFill>
@@ -13173,7 +13118,7 @@
               <a:t>db:5432:</a:t>
             </a:r>
             <a:r>
-              <a:rPr lang="en-US" sz="2250" b="1" dirty="0" spc="-3" kern="0">
+              <a:rPr lang="en-US" sz="2550" b="1" dirty="0" spc="-2" kern="0">
                 <a:solidFill>
                   <a:srgbClr val="E8472B"/>
                 </a:solidFill>
@@ -13184,7 +13129,7 @@
               <a:t> cùng</a:t>
             </a:r>
             <a:r>
-              <a:rPr lang="en-US" sz="2250" b="1" dirty="0" spc="-9" kern="0">
+              <a:rPr lang="en-US" sz="2550" b="1" dirty="0" spc="-12" kern="0">
                 <a:solidFill>
                   <a:srgbClr val="E8472B"/>
                 </a:solidFill>
@@ -13195,7 +13140,7 @@
               <a:t> network,</a:t>
             </a:r>
             <a:r>
-              <a:rPr lang="en-US" sz="2250" b="1" dirty="0" spc="-3" kern="0">
+              <a:rPr lang="en-US" sz="2550" b="1" dirty="0" spc="-1" kern="0">
                 <a:solidFill>
                   <a:srgbClr val="E8472B"/>
                 </a:solidFill>
@@ -13203,10 +13148,10 @@
                 <a:ea typeface="Be Vietnam Pro" pitchFamily="34" charset="-122"/>
                 <a:cs typeface="Be Vietnam Pro" pitchFamily="34" charset="-120"/>
               </a:rPr>
-              <a:t> gọi bằng</a:t>
-            </a:r>
-            <a:r>
-              <a:rPr lang="en-US" sz="2250" b="1" dirty="0" spc="-7" kern="0">
+              <a:t> gọi</a:t>
+            </a:r>
+            <a:r>
+              <a:rPr lang="en-US" sz="2550" b="1" dirty="0" spc="-2" kern="0">
                 <a:solidFill>
                   <a:srgbClr val="E8472B"/>
                 </a:solidFill>
@@ -13214,10 +13159,21 @@
                 <a:ea typeface="Be Vietnam Pro" pitchFamily="34" charset="-122"/>
                 <a:cs typeface="Be Vietnam Pro" pitchFamily="34" charset="-120"/>
               </a:rPr>
+              <a:t> bằng</a:t>
+            </a:r>
+            <a:r>
+              <a:rPr lang="en-US" sz="2550" b="1" dirty="0" spc="-8" kern="0">
+                <a:solidFill>
+                  <a:srgbClr val="E8472B"/>
+                </a:solidFill>
+                <a:latin typeface="Be Vietnam Pro" pitchFamily="34" charset="0"/>
+                <a:ea typeface="Be Vietnam Pro" pitchFamily="34" charset="-122"/>
+                <a:cs typeface="Be Vietnam Pro" pitchFamily="34" charset="-120"/>
+              </a:rPr>
               <a:t> tên</a:t>
             </a:r>
             <a:r>
-              <a:rPr lang="en-US" sz="2250" b="1" dirty="0" spc="4" kern="0">
+              <a:rPr lang="en-US" sz="2550" b="1" dirty="0" spc="0" kern="0">
                 <a:solidFill>
                   <a:srgbClr val="E8472B"/>
                 </a:solidFill>
@@ -13228,7 +13184,7 @@
               <a:t> dịch</a:t>
             </a:r>
             <a:r>
-              <a:rPr lang="en-US" sz="2250" b="1" dirty="0" spc="2" kern="0">
+              <a:rPr lang="en-US" sz="2550" b="1" dirty="0" spc="-1" kern="0">
                 <a:solidFill>
                   <a:srgbClr val="E8472B"/>
                 </a:solidFill>
@@ -13238,7 +13194,7 @@
               </a:rPr>
               <a:t> vụ</a:t>
             </a:r>
-            <a:endParaRPr lang="en-US" sz="2250" dirty="0"/>
+            <a:endParaRPr lang="en-US" sz="2550" dirty="0"/>
           </a:p>
         </p:txBody>
       </p:sp>
@@ -13289,7 +13245,7 @@
               <a:buNone/>
             </a:pPr>
             <a:r>
-              <a:rPr lang="en-US" sz="2400" dirty="0" spc="57" kern="0">
+              <a:rPr lang="en-US" sz="2550" dirty="0" spc="66" kern="0">
                 <a:solidFill>
                   <a:srgbClr val="14161C"/>
                 </a:solidFill>
@@ -13300,7 +13256,7 @@
               <a:t>Vì</a:t>
             </a:r>
             <a:r>
-              <a:rPr lang="en-US" sz="2400" dirty="0" spc="2" kern="0">
+              <a:rPr lang="en-US" sz="2550" dirty="0" spc="0" kern="0">
                 <a:solidFill>
                   <a:srgbClr val="14161C"/>
                 </a:solidFill>
@@ -13311,7 +13267,7 @@
               <a:t> mỗi</a:t>
             </a:r>
             <a:r>
-              <a:rPr lang="en-US" sz="2400" dirty="0" spc="-9" kern="0">
+              <a:rPr lang="en-US" sz="2550" dirty="0" spc="-10" kern="0">
                 <a:solidFill>
                   <a:srgbClr val="14161C"/>
                 </a:solidFill>
@@ -13322,7 +13278,7 @@
               <a:t> container</a:t>
             </a:r>
             <a:r>
-              <a:rPr lang="en-US" sz="2400" dirty="0" spc="0" kern="0">
+              <a:rPr lang="en-US" sz="2550" dirty="0" spc="-1" kern="0">
                 <a:solidFill>
                   <a:srgbClr val="14161C"/>
                 </a:solidFill>
@@ -13333,7 +13289,7 @@
               <a:t> có</a:t>
             </a:r>
             <a:r>
-              <a:rPr lang="en-US" sz="2400" dirty="0" spc="1" kern="0">
+              <a:rPr lang="en-US" sz="2550" dirty="0" spc="0" kern="0">
                 <a:solidFill>
                   <a:srgbClr val="14161C"/>
                 </a:solidFill>
@@ -13344,7 +13300,7 @@
               <a:t> không gian</a:t>
             </a:r>
             <a:r>
-              <a:rPr lang="en-US" sz="2400" dirty="0" spc="4" kern="0">
+              <a:rPr lang="en-US" sz="2550" dirty="0" spc="1" kern="0">
                 <a:solidFill>
                   <a:srgbClr val="14161C"/>
                 </a:solidFill>
@@ -13355,7 +13311,7 @@
               <a:t> mạng</a:t>
             </a:r>
             <a:r>
-              <a:rPr lang="en-US" sz="2400" dirty="0" spc="7" kern="0">
+              <a:rPr lang="en-US" sz="2550" dirty="0" spc="8" kern="0">
                 <a:solidFill>
                   <a:srgbClr val="14161C"/>
                 </a:solidFill>
@@ -13365,7 +13321,7 @@
               </a:rPr>
               <a:t> riêng.</a:t>
             </a:r>
-            <a:endParaRPr lang="en-US" sz="2400" dirty="0"/>
+            <a:endParaRPr lang="en-US" sz="2550" dirty="0"/>
           </a:p>
         </p:txBody>
       </p:sp>
@@ -14082,17 +14038,17 @@
           <a:ln/>
         </p:spPr>
         <p:txBody>
-          <a:bodyPr wrap="square" lIns="0" tIns="5001" rIns="0" bIns="-5001" rtlCol="0" anchor="t"/>
+          <a:bodyPr wrap="square" lIns="0" tIns="5667" rIns="0" bIns="-5667" rtlCol="0" anchor="t"/>
           <a:lstStyle/>
           <a:p>
             <a:pPr algn="l" indent="0" marL="0">
               <a:lnSpc>
-                <a:spcPts val="3150"/>
+                <a:spcPts val="3570"/>
               </a:lnSpc>
               <a:buNone/>
             </a:pPr>
             <a:r>
-              <a:rPr lang="en-US" sz="2250" dirty="0" spc="-11" kern="0">
+              <a:rPr lang="en-US" sz="2550" dirty="0" spc="-10" kern="0">
                 <a:solidFill>
                   <a:srgbClr val="E4E1D8"/>
                 </a:solidFill>
@@ -14103,7 +14059,7 @@
               <a:t>Image</a:t>
             </a:r>
             <a:r>
-              <a:rPr lang="en-US" sz="2250" dirty="0" spc="1" kern="0">
+              <a:rPr lang="en-US" sz="2550" dirty="0" spc="1" kern="0">
                 <a:solidFill>
                   <a:srgbClr val="E4E1D8"/>
                 </a:solidFill>
@@ -14114,7 +14070,7 @@
               <a:t> chỉ</a:t>
             </a:r>
             <a:r>
-              <a:rPr lang="en-US" sz="2250" dirty="0" spc="9" kern="0">
+              <a:rPr lang="en-US" sz="2550" dirty="0" spc="7" kern="0">
                 <a:solidFill>
                   <a:srgbClr val="E4E1D8"/>
                 </a:solidFill>
@@ -14125,7 +14081,7 @@
               <a:t> đọc;</a:t>
             </a:r>
             <a:r>
-              <a:rPr lang="en-US" sz="2250" dirty="0" spc="3" kern="0">
+              <a:rPr lang="en-US" sz="2550" dirty="0" spc="0" kern="0">
                 <a:solidFill>
                   <a:srgbClr val="E4E1D8"/>
                 </a:solidFill>
@@ -14133,10 +14089,10 @@
                 <a:ea typeface="Be Vietnam Pro" pitchFamily="34" charset="-122"/>
                 <a:cs typeface="Be Vietnam Pro" pitchFamily="34" charset="-120"/>
               </a:rPr>
-              <a:t> lớp</a:t>
-            </a:r>
-            <a:r>
-              <a:rPr lang="en-US" sz="2250" dirty="0" spc="-1" kern="0">
+              <a:t> lớp ghi</a:t>
+            </a:r>
+            <a:r>
+              <a:rPr lang="en-US" sz="2550" dirty="0" spc="-11" kern="0">
                 <a:solidFill>
                   <a:srgbClr val="E4E1D8"/>
                 </a:solidFill>
@@ -14144,10 +14100,10 @@
                 <a:ea typeface="Be Vietnam Pro" pitchFamily="34" charset="-122"/>
                 <a:cs typeface="Be Vietnam Pro" pitchFamily="34" charset="-120"/>
               </a:rPr>
-              <a:t> ghi</a:t>
-            </a:r>
-            <a:r>
-              <a:rPr lang="en-US" sz="2250" dirty="0" spc="-12" kern="0">
+              <a:t> mất</a:t>
+            </a:r>
+            <a:r>
+              <a:rPr lang="en-US" sz="2550" dirty="0" spc="0" kern="0">
                 <a:solidFill>
                   <a:srgbClr val="E4E1D8"/>
                 </a:solidFill>
@@ -14155,10 +14111,10 @@
                 <a:ea typeface="Be Vietnam Pro" pitchFamily="34" charset="-122"/>
                 <a:cs typeface="Be Vietnam Pro" pitchFamily="34" charset="-120"/>
               </a:rPr>
-              <a:t> mất</a:t>
-            </a:r>
-            <a:r>
-              <a:rPr lang="en-US" sz="2250" dirty="0" spc="-1" kern="0">
+              <a:t> khi</a:t>
+            </a:r>
+            <a:r>
+              <a:rPr lang="en-US" sz="2550" dirty="0" spc="-23" kern="0">
                 <a:solidFill>
                   <a:srgbClr val="E4E1D8"/>
                 </a:solidFill>
@@ -14166,10 +14122,10 @@
                 <a:ea typeface="Be Vietnam Pro" pitchFamily="34" charset="-122"/>
                 <a:cs typeface="Be Vietnam Pro" pitchFamily="34" charset="-120"/>
               </a:rPr>
-              <a:t> khi</a:t>
-            </a:r>
-            <a:r>
-              <a:rPr lang="en-US" sz="2250" dirty="0" spc="-20" kern="0">
+              <a:t> xóa</a:t>
+            </a:r>
+            <a:r>
+              <a:rPr lang="en-US" sz="2550" dirty="0" spc="-9" kern="0">
                 <a:solidFill>
                   <a:srgbClr val="E4E1D8"/>
                 </a:solidFill>
@@ -14177,20 +14133,9 @@
                 <a:ea typeface="Be Vietnam Pro" pitchFamily="34" charset="-122"/>
                 <a:cs typeface="Be Vietnam Pro" pitchFamily="34" charset="-120"/>
               </a:rPr>
-              <a:t> xóa</a:t>
-            </a:r>
-            <a:r>
-              <a:rPr lang="en-US" sz="2250" dirty="0" spc="-9" kern="0">
-                <a:solidFill>
-                  <a:srgbClr val="E4E1D8"/>
-                </a:solidFill>
-                <a:latin typeface="Be Vietnam Pro" pitchFamily="34" charset="0"/>
-                <a:ea typeface="Be Vietnam Pro" pitchFamily="34" charset="-122"/>
-                <a:cs typeface="Be Vietnam Pro" pitchFamily="34" charset="-120"/>
-              </a:rPr>
               <a:t> container.</a:t>
             </a:r>
-            <a:endParaRPr lang="en-US" sz="2250" dirty="0"/>
+            <a:endParaRPr lang="en-US" sz="2550" dirty="0"/>
           </a:p>
         </p:txBody>
       </p:sp>
@@ -14278,17 +14223,17 @@
           <a:ln/>
         </p:spPr>
         <p:txBody>
-          <a:bodyPr wrap="square" lIns="0" tIns="5001" rIns="0" bIns="-5001" rtlCol="0" anchor="t"/>
+          <a:bodyPr wrap="square" lIns="0" tIns="5667" rIns="0" bIns="-5667" rtlCol="0" anchor="t"/>
           <a:lstStyle/>
           <a:p>
             <a:pPr algn="l" indent="0" marL="0">
               <a:lnSpc>
-                <a:spcPts val="3150"/>
+                <a:spcPts val="3570"/>
               </a:lnSpc>
               <a:buNone/>
             </a:pPr>
             <a:r>
-              <a:rPr lang="en-US" sz="2250" dirty="0" spc="-1" kern="0">
+              <a:rPr lang="en-US" sz="2550" dirty="0" spc="1" kern="0">
                 <a:solidFill>
                   <a:srgbClr val="E4E1D8"/>
                 </a:solidFill>
@@ -14299,7 +14244,7 @@
               <a:t>Bridge</a:t>
             </a:r>
             <a:r>
-              <a:rPr lang="en-US" sz="2250" dirty="0" spc="3" kern="0">
+              <a:rPr lang="en-US" sz="2550" dirty="0" spc="0" kern="0">
                 <a:solidFill>
                   <a:srgbClr val="E4E1D8"/>
                 </a:solidFill>
@@ -14310,7 +14255,7 @@
               <a:t> tự</a:t>
             </a:r>
             <a:r>
-              <a:rPr lang="en-US" sz="2250" dirty="0" spc="-13" kern="0">
+              <a:rPr lang="en-US" sz="2550" dirty="0" spc="-11" kern="0">
                 <a:solidFill>
                   <a:srgbClr val="E4E1D8"/>
                 </a:solidFill>
@@ -14321,7 +14266,7 @@
               <a:t> tạo</a:t>
             </a:r>
             <a:r>
-              <a:rPr lang="en-US" sz="2250" dirty="0" spc="1" kern="0">
+              <a:rPr lang="en-US" sz="2550" dirty="0" spc="0" kern="0">
                 <a:solidFill>
                   <a:srgbClr val="E4E1D8"/>
                 </a:solidFill>
@@ -14329,10 +14274,10 @@
                 <a:ea typeface="Be Vietnam Pro" pitchFamily="34" charset="-122"/>
                 <a:cs typeface="Be Vietnam Pro" pitchFamily="34" charset="-120"/>
               </a:rPr>
-              <a:t> phân</a:t>
-            </a:r>
-            <a:r>
-              <a:rPr lang="en-US" sz="2250" dirty="0" spc="-3" kern="0">
+              <a:t> phân giải</a:t>
+            </a:r>
+            <a:r>
+              <a:rPr lang="en-US" sz="2550" dirty="0" spc="-10" kern="0">
                 <a:solidFill>
                   <a:srgbClr val="E4E1D8"/>
                 </a:solidFill>
@@ -14340,10 +14285,10 @@
                 <a:ea typeface="Be Vietnam Pro" pitchFamily="34" charset="-122"/>
                 <a:cs typeface="Be Vietnam Pro" pitchFamily="34" charset="-120"/>
               </a:rPr>
-              <a:t> giải</a:t>
-            </a:r>
-            <a:r>
-              <a:rPr lang="en-US" sz="2250" dirty="0" spc="-10" kern="0">
+              <a:t> tên;</a:t>
+            </a:r>
+            <a:r>
+              <a:rPr lang="en-US" sz="2550" dirty="0" spc="0" kern="0">
                 <a:solidFill>
                   <a:srgbClr val="E4E1D8"/>
                 </a:solidFill>
@@ -14351,10 +14296,10 @@
                 <a:ea typeface="Be Vietnam Pro" pitchFamily="34" charset="-122"/>
                 <a:cs typeface="Be Vietnam Pro" pitchFamily="34" charset="-120"/>
               </a:rPr>
-              <a:t> tên;</a:t>
-            </a:r>
-            <a:r>
-              <a:rPr lang="en-US" sz="2250" dirty="0" spc="0" kern="0">
+              <a:t> bridge</a:t>
+            </a:r>
+            <a:r>
+              <a:rPr lang="en-US" sz="2550" dirty="0" spc="1" kern="0">
                 <a:solidFill>
                   <a:srgbClr val="E4E1D8"/>
                 </a:solidFill>
@@ -14362,10 +14307,10 @@
                 <a:ea typeface="Be Vietnam Pro" pitchFamily="34" charset="-122"/>
                 <a:cs typeface="Be Vietnam Pro" pitchFamily="34" charset="-120"/>
               </a:rPr>
-              <a:t> bridge</a:t>
-            </a:r>
-            <a:r>
-              <a:rPr lang="en-US" sz="2250" dirty="0" spc="-1" kern="0">
+              <a:t> mặc</a:t>
+            </a:r>
+            <a:r>
+              <a:rPr lang="en-US" sz="2550" dirty="0" spc="21" kern="0">
                 <a:solidFill>
                   <a:srgbClr val="E4E1D8"/>
                 </a:solidFill>
@@ -14373,10 +14318,10 @@
                 <a:ea typeface="Be Vietnam Pro" pitchFamily="34" charset="-122"/>
                 <a:cs typeface="Be Vietnam Pro" pitchFamily="34" charset="-120"/>
               </a:rPr>
-              <a:t> mặc</a:t>
-            </a:r>
-            <a:r>
-              <a:rPr lang="en-US" sz="2250" dirty="0" spc="19" kern="0">
+              <a:t> định</a:t>
+            </a:r>
+            <a:r>
+              <a:rPr lang="en-US" sz="2550" dirty="0" spc="1" kern="0">
                 <a:solidFill>
                   <a:srgbClr val="E4E1D8"/>
                 </a:solidFill>
@@ -14384,20 +14329,9 @@
                 <a:ea typeface="Be Vietnam Pro" pitchFamily="34" charset="-122"/>
                 <a:cs typeface="Be Vietnam Pro" pitchFamily="34" charset="-120"/>
               </a:rPr>
-              <a:t> định</a:t>
-            </a:r>
-            <a:r>
-              <a:rPr lang="en-US" sz="2250" dirty="0" spc="2" kern="0">
-                <a:solidFill>
-                  <a:srgbClr val="E4E1D8"/>
-                </a:solidFill>
-                <a:latin typeface="Be Vietnam Pro" pitchFamily="34" charset="0"/>
-                <a:ea typeface="Be Vietnam Pro" pitchFamily="34" charset="-122"/>
-                <a:cs typeface="Be Vietnam Pro" pitchFamily="34" charset="-120"/>
-              </a:rPr>
               <a:t> không.</a:t>
             </a:r>
-            <a:endParaRPr lang="en-US" sz="2250" dirty="0"/>
+            <a:endParaRPr lang="en-US" sz="2550" dirty="0"/>
           </a:p>
         </p:txBody>
       </p:sp>
@@ -14496,17 +14430,17 @@
           <a:ln/>
         </p:spPr>
         <p:txBody>
-          <a:bodyPr wrap="square" lIns="0" tIns="5001" rIns="0" bIns="-5001" rtlCol="0" anchor="t"/>
+          <a:bodyPr wrap="square" lIns="0" tIns="5667" rIns="0" bIns="-5667" rtlCol="0" anchor="t"/>
           <a:lstStyle/>
           <a:p>
             <a:pPr algn="l" indent="0" marL="0">
               <a:lnSpc>
-                <a:spcPts val="3150"/>
+                <a:spcPts val="3570"/>
               </a:lnSpc>
               <a:buNone/>
             </a:pPr>
             <a:r>
-              <a:rPr lang="en-US" sz="2250" dirty="0" spc="5" kern="0">
+              <a:rPr lang="en-US" sz="2550" dirty="0" spc="0" kern="0">
                 <a:solidFill>
                   <a:srgbClr val="E4E1D8"/>
                 </a:solidFill>
@@ -14514,10 +14448,10 @@
                 <a:ea typeface="Be Vietnam Pro" pitchFamily="34" charset="-122"/>
                 <a:cs typeface="Be Vietnam Pro" pitchFamily="34" charset="-120"/>
               </a:rPr>
-              <a:t>-p</a:t>
-            </a:r>
-            <a:r>
-              <a:rPr lang="en-US" sz="2250" dirty="0" spc="2" kern="0">
+              <a:t>-p cổng</a:t>
+            </a:r>
+            <a:r>
+              <a:rPr lang="en-US" sz="2550" dirty="0" spc="-2" kern="0">
                 <a:solidFill>
                   <a:srgbClr val="E4E1D8"/>
                 </a:solidFill>
@@ -14525,10 +14459,32 @@
                 <a:ea typeface="Be Vietnam Pro" pitchFamily="34" charset="-122"/>
                 <a:cs typeface="Be Vietnam Pro" pitchFamily="34" charset="-120"/>
               </a:rPr>
+              <a:t> cụ</a:t>
+            </a:r>
+            <a:r>
+              <a:rPr lang="en-US" sz="2550" dirty="0" spc="1" kern="0">
+                <a:solidFill>
+                  <a:srgbClr val="E4E1D8"/>
+                </a:solidFill>
+                <a:latin typeface="Be Vietnam Pro" pitchFamily="34" charset="0"/>
+                <a:ea typeface="Be Vietnam Pro" pitchFamily="34" charset="-122"/>
+                <a:cs typeface="Be Vietnam Pro" pitchFamily="34" charset="-120"/>
+              </a:rPr>
+              <a:t> thể; -P</a:t>
+            </a:r>
+            <a:r>
+              <a:rPr lang="en-US" sz="2550" dirty="0" spc="0" kern="0">
+                <a:solidFill>
+                  <a:srgbClr val="E4E1D8"/>
+                </a:solidFill>
+                <a:latin typeface="Be Vietnam Pro" pitchFamily="34" charset="0"/>
+                <a:ea typeface="Be Vietnam Pro" pitchFamily="34" charset="-122"/>
+                <a:cs typeface="Be Vietnam Pro" pitchFamily="34" charset="-120"/>
+              </a:rPr>
               <a:t> cổng</a:t>
             </a:r>
             <a:r>
-              <a:rPr lang="en-US" sz="2250" dirty="0" spc="5" kern="0">
+              <a:rPr lang="en-US" sz="2550" dirty="0" spc="-8" kern="0">
                 <a:solidFill>
                   <a:srgbClr val="E4E1D8"/>
                 </a:solidFill>
@@ -14536,10 +14492,10 @@
                 <a:ea typeface="Be Vietnam Pro" pitchFamily="34" charset="-122"/>
                 <a:cs typeface="Be Vietnam Pro" pitchFamily="34" charset="-120"/>
               </a:rPr>
-              <a:t> cụ</a:t>
-            </a:r>
-            <a:r>
-              <a:rPr lang="en-US" sz="2250" dirty="0" spc="-1" kern="0">
+              <a:t> ngẫu</a:t>
+            </a:r>
+            <a:r>
+              <a:rPr lang="en-US" sz="2550" dirty="0" spc="0" kern="0">
                 <a:solidFill>
                   <a:srgbClr val="E4E1D8"/>
                 </a:solidFill>
@@ -14547,42 +14503,9 @@
                 <a:ea typeface="Be Vietnam Pro" pitchFamily="34" charset="-122"/>
                 <a:cs typeface="Be Vietnam Pro" pitchFamily="34" charset="-120"/>
               </a:rPr>
-              <a:t> thể;</a:t>
-            </a:r>
-            <a:r>
-              <a:rPr lang="en-US" sz="2250" dirty="0" spc="3" kern="0">
-                <a:solidFill>
-                  <a:srgbClr val="E4E1D8"/>
-                </a:solidFill>
-                <a:latin typeface="Be Vietnam Pro" pitchFamily="34" charset="0"/>
-                <a:ea typeface="Be Vietnam Pro" pitchFamily="34" charset="-122"/>
-                <a:cs typeface="Be Vietnam Pro" pitchFamily="34" charset="-120"/>
-              </a:rPr>
-              <a:t> -P cổng</a:t>
-            </a:r>
-            <a:r>
-              <a:rPr lang="en-US" sz="2250" dirty="0" spc="-10" kern="0">
-                <a:solidFill>
-                  <a:srgbClr val="E4E1D8"/>
-                </a:solidFill>
-                <a:latin typeface="Be Vietnam Pro" pitchFamily="34" charset="0"/>
-                <a:ea typeface="Be Vietnam Pro" pitchFamily="34" charset="-122"/>
-                <a:cs typeface="Be Vietnam Pro" pitchFamily="34" charset="-120"/>
-              </a:rPr>
-              <a:t> ngẫu</a:t>
-            </a:r>
-            <a:r>
-              <a:rPr lang="en-US" sz="2250" dirty="0" spc="0" kern="0">
-                <a:solidFill>
-                  <a:srgbClr val="E4E1D8"/>
-                </a:solidFill>
-                <a:latin typeface="Be Vietnam Pro" pitchFamily="34" charset="0"/>
-                <a:ea typeface="Be Vietnam Pro" pitchFamily="34" charset="-122"/>
-                <a:cs typeface="Be Vietnam Pro" pitchFamily="34" charset="-120"/>
-              </a:rPr>
               <a:t> nhiên.</a:t>
             </a:r>
-            <a:endParaRPr lang="en-US" sz="2250" dirty="0"/>
+            <a:endParaRPr lang="en-US" sz="2550" dirty="0"/>
           </a:p>
         </p:txBody>
       </p:sp>
@@ -14681,17 +14604,17 @@
           <a:ln/>
         </p:spPr>
         <p:txBody>
-          <a:bodyPr wrap="square" lIns="0" tIns="5001" rIns="0" bIns="-5001" rtlCol="0" anchor="t"/>
+          <a:bodyPr wrap="square" lIns="0" tIns="5667" rIns="0" bIns="-5667" rtlCol="0" anchor="t"/>
           <a:lstStyle/>
           <a:p>
             <a:pPr algn="l" indent="0" marL="0">
               <a:lnSpc>
-                <a:spcPts val="3150"/>
+                <a:spcPts val="3570"/>
               </a:lnSpc>
               <a:buNone/>
             </a:pPr>
             <a:r>
-              <a:rPr lang="en-US" sz="2250" dirty="0" spc="-3" kern="0">
+              <a:rPr lang="en-US" sz="2550" dirty="0" spc="-1" kern="0">
                 <a:solidFill>
                   <a:srgbClr val="E4E1D8"/>
                 </a:solidFill>
@@ -14702,7 +14625,7 @@
               <a:t>no,</a:t>
             </a:r>
             <a:r>
-              <a:rPr lang="en-US" sz="2250" dirty="0" spc="-14" kern="0">
+              <a:rPr lang="en-US" sz="2550" dirty="0" spc="-15" kern="0">
                 <a:solidFill>
                   <a:srgbClr val="E4E1D8"/>
                 </a:solidFill>
@@ -14710,10 +14633,10 @@
                 <a:ea typeface="Be Vietnam Pro" pitchFamily="34" charset="-122"/>
                 <a:cs typeface="Be Vietnam Pro" pitchFamily="34" charset="-120"/>
               </a:rPr>
-              <a:t> on-failure,</a:t>
-            </a:r>
-            <a:r>
-              <a:rPr lang="en-US" sz="2250" dirty="0" spc="-15" kern="0">
+              <a:t> on-failure, always,</a:t>
+            </a:r>
+            <a:r>
+              <a:rPr lang="en-US" sz="2550" dirty="0" spc="-6" kern="0">
                 <a:solidFill>
                   <a:srgbClr val="E4E1D8"/>
                 </a:solidFill>
@@ -14721,20 +14644,9 @@
                 <a:ea typeface="Be Vietnam Pro" pitchFamily="34" charset="-122"/>
                 <a:cs typeface="Be Vietnam Pro" pitchFamily="34" charset="-120"/>
               </a:rPr>
-              <a:t> always,</a:t>
-            </a:r>
-            <a:r>
-              <a:rPr lang="en-US" sz="2250" dirty="0" spc="-3" kern="0">
-                <a:solidFill>
-                  <a:srgbClr val="E4E1D8"/>
-                </a:solidFill>
-                <a:latin typeface="Be Vietnam Pro" pitchFamily="34" charset="0"/>
-                <a:ea typeface="Be Vietnam Pro" pitchFamily="34" charset="-122"/>
-                <a:cs typeface="Be Vietnam Pro" pitchFamily="34" charset="-120"/>
-              </a:rPr>
               <a:t> unless-stopped.</a:t>
             </a:r>
-            <a:endParaRPr lang="en-US" sz="2250" dirty="0"/>
+            <a:endParaRPr lang="en-US" sz="2550" dirty="0"/>
           </a:p>
         </p:txBody>
       </p:sp>
@@ -14855,17 +14767,17 @@
           <a:ln/>
         </p:spPr>
         <p:txBody>
-          <a:bodyPr wrap="square" lIns="0" tIns="5001" rIns="0" bIns="-5001" rtlCol="0" anchor="t"/>
+          <a:bodyPr wrap="square" lIns="0" tIns="5667" rIns="0" bIns="-5667" rtlCol="0" anchor="t"/>
           <a:lstStyle/>
           <a:p>
             <a:pPr algn="l" indent="0" marL="0">
               <a:lnSpc>
-                <a:spcPts val="3150"/>
+                <a:spcPts val="3570"/>
               </a:lnSpc>
               <a:buNone/>
             </a:pPr>
             <a:r>
-              <a:rPr lang="en-US" sz="2250" dirty="0" spc="1" kern="0">
+              <a:rPr lang="en-US" sz="2550" dirty="0" spc="-1" kern="0">
                 <a:solidFill>
                   <a:srgbClr val="E4E1D8"/>
                 </a:solidFill>
@@ -14876,7 +14788,7 @@
               <a:t>depends_on</a:t>
             </a:r>
             <a:r>
-              <a:rPr lang="en-US" sz="2250" dirty="0" spc="0" kern="0">
+              <a:rPr lang="en-US" sz="2550" dirty="0" spc="0" kern="0">
                 <a:solidFill>
                   <a:srgbClr val="E4E1D8"/>
                 </a:solidFill>
@@ -14887,7 +14799,7 @@
               <a:t> chỉ</a:t>
             </a:r>
             <a:r>
-              <a:rPr lang="en-US" sz="2250" dirty="0" spc="-17" kern="0">
+              <a:rPr lang="en-US" sz="2550" dirty="0" spc="-19" kern="0">
                 <a:solidFill>
                   <a:srgbClr val="E4E1D8"/>
                 </a:solidFill>
@@ -14898,7 +14810,7 @@
               <a:t> xếp</a:t>
             </a:r>
             <a:r>
-              <a:rPr lang="en-US" sz="2250" dirty="0" spc="3" kern="0">
+              <a:rPr lang="en-US" sz="2550" dirty="0" spc="0" kern="0">
                 <a:solidFill>
                   <a:srgbClr val="E4E1D8"/>
                 </a:solidFill>
@@ -14909,7 +14821,7 @@
               <a:t> thứ</a:t>
             </a:r>
             <a:r>
-              <a:rPr lang="en-US" sz="2250" dirty="0" spc="1" kern="0">
+              <a:rPr lang="en-US" sz="2550" dirty="0" spc="-2" kern="0">
                 <a:solidFill>
                   <a:srgbClr val="E4E1D8"/>
                 </a:solidFill>
@@ -14920,7 +14832,7 @@
               <a:t> tự;</a:t>
             </a:r>
             <a:r>
-              <a:rPr lang="en-US" sz="2250" dirty="0" spc="-7" kern="0">
+              <a:rPr lang="en-US" sz="2550" dirty="0" spc="-7" kern="0">
                 <a:solidFill>
                   <a:srgbClr val="E4E1D8"/>
                 </a:solidFill>
@@ -14931,7 +14843,7 @@
               <a:t> service_healthy</a:t>
             </a:r>
             <a:r>
-              <a:rPr lang="en-US" sz="2250" dirty="0" spc="0" kern="0">
+              <a:rPr lang="en-US" sz="2550" dirty="0" spc="-1" kern="0">
                 <a:solidFill>
                   <a:srgbClr val="E4E1D8"/>
                 </a:solidFill>
@@ -14942,7 +14854,7 @@
               <a:t> mới</a:t>
             </a:r>
             <a:r>
-              <a:rPr lang="en-US" sz="2250" dirty="0" spc="11" kern="0">
+              <a:rPr lang="en-US" sz="2550" dirty="0" spc="11" kern="0">
                 <a:solidFill>
                   <a:srgbClr val="E4E1D8"/>
                 </a:solidFill>
@@ -14952,7 +14864,7 @@
               </a:rPr>
               <a:t> đợi.</a:t>
             </a:r>
-            <a:endParaRPr lang="en-US" sz="2250" dirty="0"/>
+            <a:endParaRPr lang="en-US" sz="2550" dirty="0"/>
           </a:p>
         </p:txBody>
       </p:sp>
@@ -15051,17 +14963,17 @@
           <a:ln/>
         </p:spPr>
         <p:txBody>
-          <a:bodyPr wrap="square" lIns="0" tIns="5001" rIns="0" bIns="-5001" rtlCol="0" anchor="t"/>
+          <a:bodyPr wrap="square" lIns="0" tIns="5667" rIns="0" bIns="-5667" rtlCol="0" anchor="t"/>
           <a:lstStyle/>
           <a:p>
             <a:pPr algn="l" indent="0" marL="0">
               <a:lnSpc>
-                <a:spcPts val="3150"/>
+                <a:spcPts val="3570"/>
               </a:lnSpc>
               <a:buNone/>
             </a:pPr>
             <a:r>
-              <a:rPr lang="en-US" sz="2250" dirty="0" spc="-23" kern="0">
+              <a:rPr lang="en-US" sz="2550" dirty="0" spc="-29" kern="0">
                 <a:solidFill>
                   <a:srgbClr val="E4E1D8"/>
                 </a:solidFill>
@@ -15072,7 +14984,7 @@
               <a:t>DB_PASSWORD</a:t>
             </a:r>
             <a:r>
-              <a:rPr lang="en-US" sz="2250" dirty="0" spc="-16" kern="0">
+              <a:rPr lang="en-US" sz="2550" dirty="0" spc="-16" kern="0">
                 <a:solidFill>
                   <a:srgbClr val="E4E1D8"/>
                 </a:solidFill>
@@ -15083,7 +14995,7 @@
               <a:t> trong</a:t>
             </a:r>
             <a:r>
-              <a:rPr lang="en-US" sz="2250" dirty="0" spc="-7" kern="0">
+              <a:rPr lang="en-US" sz="2550" dirty="0" spc="-9" kern="0">
                 <a:solidFill>
                   <a:srgbClr val="E4E1D8"/>
                 </a:solidFill>
@@ -15094,7 +15006,7 @@
               <a:t> .env,</a:t>
             </a:r>
             <a:r>
-              <a:rPr lang="en-US" sz="2250" dirty="0" spc="1" kern="0">
+              <a:rPr lang="en-US" sz="2550" dirty="0" spc="0" kern="0">
                 <a:solidFill>
                   <a:srgbClr val="E4E1D8"/>
                 </a:solidFill>
@@ -15105,7 +15017,7 @@
               <a:t> không</a:t>
             </a:r>
             <a:r>
-              <a:rPr lang="en-US" sz="2250" dirty="0" spc="8" kern="0">
+              <a:rPr lang="en-US" sz="2550" dirty="0" spc="8" kern="0">
                 <a:solidFill>
                   <a:srgbClr val="E4E1D8"/>
                 </a:solidFill>
@@ -15116,7 +15028,7 @@
               <a:t> đưa</a:t>
             </a:r>
             <a:r>
-              <a:rPr lang="en-US" sz="2250" dirty="0" spc="-14" kern="0">
+              <a:rPr lang="en-US" sz="2550" dirty="0" spc="-14" kern="0">
                 <a:solidFill>
                   <a:srgbClr val="E4E1D8"/>
                 </a:solidFill>
@@ -15127,7 +15039,7 @@
               <a:t> vào</a:t>
             </a:r>
             <a:r>
-              <a:rPr lang="en-US" sz="2250" dirty="0" spc="1" kern="0">
+              <a:rPr lang="en-US" sz="2550" dirty="0" spc="0" kern="0">
                 <a:solidFill>
                   <a:srgbClr val="E4E1D8"/>
                 </a:solidFill>
@@ -15137,7 +15049,7 @@
               </a:rPr>
               <a:t> Git.</a:t>
             </a:r>
-            <a:endParaRPr lang="en-US" sz="2250" dirty="0"/>
+            <a:endParaRPr lang="en-US" sz="2550" dirty="0"/>
           </a:p>
         </p:txBody>
       </p:sp>

--- a/system-design-101/vi/lessons/sd-13-013/slides/sd-13-013.pptx
+++ b/system-design-101/vi/lessons/sd-13-013/slides/sd-13-013.pptx
@@ -2226,7 +2226,7 @@
               <a:buNone/>
             </a:pPr>
             <a:r>
-              <a:rPr lang="en-US" sz="2496" dirty="0" spc="1" kern="0">
+              <a:rPr lang="en-US" sz="2550" dirty="0" kern="0">
                 <a:solidFill>
                   <a:srgbClr val="14161C"/>
                 </a:solidFill>
@@ -2236,7 +2236,7 @@
               </a:rPr>
               <a:t>1</a:t>
             </a:r>
-            <a:endParaRPr lang="en-US" sz="2496" dirty="0"/>
+            <a:endParaRPr lang="en-US" sz="2550" dirty="0"/>
           </a:p>
         </p:txBody>
       </p:sp>
@@ -2377,7 +2377,7 @@
               <a:buNone/>
             </a:pPr>
             <a:r>
-              <a:rPr lang="en-US" sz="2496" dirty="0" spc="-5" kern="0">
+              <a:rPr lang="en-US" sz="2550" dirty="0" spc="6" kern="0">
                 <a:solidFill>
                   <a:srgbClr val="14161C"/>
                 </a:solidFill>
@@ -2387,7 +2387,7 @@
               </a:rPr>
               <a:t>2</a:t>
             </a:r>
-            <a:endParaRPr lang="en-US" sz="2496" dirty="0"/>
+            <a:endParaRPr lang="en-US" sz="2550" dirty="0"/>
           </a:p>
         </p:txBody>
       </p:sp>
@@ -2528,7 +2528,7 @@
               <a:buNone/>
             </a:pPr>
             <a:r>
-              <a:rPr lang="en-US" sz="2496" dirty="0" spc="2" kern="0">
+              <a:rPr lang="en-US" sz="2550" dirty="0" spc="2" kern="0">
                 <a:solidFill>
                   <a:srgbClr val="14161C"/>
                 </a:solidFill>
@@ -2538,7 +2538,7 @@
               </a:rPr>
               <a:t>3</a:t>
             </a:r>
-            <a:endParaRPr lang="en-US" sz="2496" dirty="0"/>
+            <a:endParaRPr lang="en-US" sz="2550" dirty="0"/>
           </a:p>
         </p:txBody>
       </p:sp>
@@ -2690,7 +2690,7 @@
               <a:buNone/>
             </a:pPr>
             <a:r>
-              <a:rPr lang="en-US" sz="2496" dirty="0" spc="5" kern="0">
+              <a:rPr lang="en-US" sz="2550" dirty="0" spc="6" kern="0">
                 <a:solidFill>
                   <a:srgbClr val="14161C"/>
                 </a:solidFill>
@@ -2700,7 +2700,7 @@
               </a:rPr>
               <a:t>4</a:t>
             </a:r>
-            <a:endParaRPr lang="en-US" sz="2496" dirty="0"/>
+            <a:endParaRPr lang="en-US" sz="2550" dirty="0"/>
           </a:p>
         </p:txBody>
       </p:sp>

--- a/system-design-101/vi/lessons/sd-13-013/slides/sd-13-013.pptx
+++ b/system-design-101/vi/lessons/sd-13-013/slides/sd-13-013.pptx
@@ -8888,7 +8888,7 @@
               <a:buNone/>
             </a:pPr>
             <a:r>
-              <a:rPr lang="en-US" sz="6900" dirty="0" spc="-186" kern="0">
+              <a:rPr lang="en-US" sz="6900" dirty="0" spc="-28" kern="0">
                 <a:solidFill>
                   <a:srgbClr val="14161C"/>
                 </a:solidFill>
@@ -8896,10 +8896,10 @@
                 <a:ea typeface="Bricolage Grotesque ExtraBold" pitchFamily="34" charset="-122"/>
                 <a:cs typeface="Bricolage Grotesque ExtraBold" pitchFamily="34" charset="-120"/>
               </a:rPr>
-              <a:t>Với</a:t>
-            </a:r>
-            <a:r>
-              <a:rPr lang="en-US" sz="6900" dirty="0" spc="-25" kern="0">
+              <a:t>Bridge</a:t>
+            </a:r>
+            <a:r>
+              <a:rPr lang="en-US" sz="6900" dirty="0" spc="1" kern="0">
                 <a:solidFill>
                   <a:srgbClr val="14161C"/>
                 </a:solidFill>
@@ -8907,7 +8907,29 @@
                 <a:ea typeface="Bricolage Grotesque ExtraBold" pitchFamily="34" charset="-122"/>
                 <a:cs typeface="Bricolage Grotesque ExtraBold" pitchFamily="34" charset="-120"/>
               </a:rPr>
-              <a:t> bridge,</a:t>
+              <a:t> như</a:t>
+            </a:r>
+            <a:r>
+              <a:rPr lang="en-US" sz="6900" dirty="0" spc="-1" kern="0">
+                <a:solidFill>
+                  <a:srgbClr val="14161C"/>
+                </a:solidFill>
+                <a:latin typeface="Bricolage Grotesque ExtraBold" pitchFamily="34" charset="0"/>
+                <a:ea typeface="Bricolage Grotesque ExtraBold" pitchFamily="34" charset="-122"/>
+                <a:cs typeface="Bricolage Grotesque ExtraBold" pitchFamily="34" charset="-120"/>
+              </a:rPr>
+              <a:t> ví</a:t>
+            </a:r>
+            <a:r>
+              <a:rPr lang="en-US" sz="6900" dirty="0" spc="2" kern="0">
+                <a:solidFill>
+                  <a:srgbClr val="14161C"/>
+                </a:solidFill>
+                <a:latin typeface="Bricolage Grotesque ExtraBold" pitchFamily="34" charset="0"/>
+                <a:ea typeface="Bricolage Grotesque ExtraBold" pitchFamily="34" charset="-122"/>
+                <a:cs typeface="Bricolage Grotesque ExtraBold" pitchFamily="34" charset="-120"/>
+              </a:rPr>
+              <a:t> dụ:</a:t>
             </a:r>
             <a:r>
               <a:rPr lang="en-US" sz="6900" dirty="0" spc="4" kern="0">
